--- a/AI_Assisted_Legacy_Refactors.pptx
+++ b/AI_Assisted_Legacy_Refactors.pptx
@@ -5,7 +5,7 @@
     <p:sldMasterId id="2147483648" r:id="rId1"/>
   </p:sldMasterIdLst>
   <p:notesMasterIdLst>
-    <p:notesMasterId r:id="rId40"/>
+    <p:notesMasterId r:id="rId39"/>
   </p:notesMasterIdLst>
   <p:sldIdLst>
     <p:sldId id="256" r:id="rId2"/>
@@ -18,34 +18,33 @@
     <p:sldId id="293" r:id="rId9"/>
     <p:sldId id="262" r:id="rId10"/>
     <p:sldId id="263" r:id="rId11"/>
-    <p:sldId id="267" r:id="rId12"/>
-    <p:sldId id="294" r:id="rId13"/>
-    <p:sldId id="295" r:id="rId14"/>
-    <p:sldId id="296" r:id="rId15"/>
-    <p:sldId id="268" r:id="rId16"/>
-    <p:sldId id="269" r:id="rId17"/>
-    <p:sldId id="270" r:id="rId18"/>
-    <p:sldId id="271" r:id="rId19"/>
-    <p:sldId id="272" r:id="rId20"/>
-    <p:sldId id="273" r:id="rId21"/>
-    <p:sldId id="274" r:id="rId22"/>
-    <p:sldId id="275" r:id="rId23"/>
-    <p:sldId id="276" r:id="rId24"/>
-    <p:sldId id="277" r:id="rId25"/>
-    <p:sldId id="278" r:id="rId26"/>
-    <p:sldId id="279" r:id="rId27"/>
-    <p:sldId id="280" r:id="rId28"/>
-    <p:sldId id="281" r:id="rId29"/>
-    <p:sldId id="282" r:id="rId30"/>
-    <p:sldId id="283" r:id="rId31"/>
-    <p:sldId id="284" r:id="rId32"/>
-    <p:sldId id="285" r:id="rId33"/>
-    <p:sldId id="286" r:id="rId34"/>
-    <p:sldId id="287" r:id="rId35"/>
-    <p:sldId id="288" r:id="rId36"/>
-    <p:sldId id="289" r:id="rId37"/>
-    <p:sldId id="290" r:id="rId38"/>
-    <p:sldId id="291" r:id="rId39"/>
+    <p:sldId id="298" r:id="rId12"/>
+    <p:sldId id="299" r:id="rId13"/>
+    <p:sldId id="267" r:id="rId14"/>
+    <p:sldId id="294" r:id="rId15"/>
+    <p:sldId id="296" r:id="rId16"/>
+    <p:sldId id="268" r:id="rId17"/>
+    <p:sldId id="269" r:id="rId18"/>
+    <p:sldId id="270" r:id="rId19"/>
+    <p:sldId id="271" r:id="rId20"/>
+    <p:sldId id="272" r:id="rId21"/>
+    <p:sldId id="273" r:id="rId22"/>
+    <p:sldId id="276" r:id="rId23"/>
+    <p:sldId id="297" r:id="rId24"/>
+    <p:sldId id="278" r:id="rId25"/>
+    <p:sldId id="279" r:id="rId26"/>
+    <p:sldId id="280" r:id="rId27"/>
+    <p:sldId id="281" r:id="rId28"/>
+    <p:sldId id="282" r:id="rId29"/>
+    <p:sldId id="283" r:id="rId30"/>
+    <p:sldId id="284" r:id="rId31"/>
+    <p:sldId id="285" r:id="rId32"/>
+    <p:sldId id="286" r:id="rId33"/>
+    <p:sldId id="287" r:id="rId34"/>
+    <p:sldId id="288" r:id="rId35"/>
+    <p:sldId id="289" r:id="rId36"/>
+    <p:sldId id="290" r:id="rId37"/>
+    <p:sldId id="291" r:id="rId38"/>
   </p:sldIdLst>
   <p:sldSz cx="18288000" cy="10287000"/>
   <p:notesSz cx="10287000" cy="18288000"/>
@@ -453,6 +452,228 @@
   <p:cSld>
     <p:spTree>
       <p:nvGrpSpPr>
+        <p:cNvPr id="1" name="">
+          <a:extLst>
+            <a:ext uri="{FF2B5EF4-FFF2-40B4-BE49-F238E27FC236}">
+              <a16:creationId xmlns:a16="http://schemas.microsoft.com/office/drawing/2014/main" id="{8FF6D489-EA2B-01C6-C809-C2AB86EBC8E6}"/>
+            </a:ext>
+          </a:extLst>
+        </p:cNvPr>
+        <p:cNvGrpSpPr/>
+        <p:nvPr/>
+      </p:nvGrpSpPr>
+      <p:grpSpPr>
+        <a:xfrm>
+          <a:off x="0" y="0"/>
+          <a:ext cx="0" cy="0"/>
+          <a:chOff x="0" y="0"/>
+          <a:chExt cx="0" cy="0"/>
+        </a:xfrm>
+      </p:grpSpPr>
+      <p:sp>
+        <p:nvSpPr>
+          <p:cNvPr id="2" name="Slide Image Placeholder 1">
+            <a:extLst>
+              <a:ext uri="{FF2B5EF4-FFF2-40B4-BE49-F238E27FC236}">
+                <a16:creationId xmlns:a16="http://schemas.microsoft.com/office/drawing/2014/main" id="{5E25C21E-55AD-33EA-11A6-FCEB4C5ED8FC}"/>
+              </a:ext>
+            </a:extLst>
+          </p:cNvPr>
+          <p:cNvSpPr>
+            <a:spLocks noGrp="1" noRot="1" noChangeAspect="1"/>
+          </p:cNvSpPr>
+          <p:nvPr>
+            <p:ph type="sldImg"/>
+          </p:nvPr>
+        </p:nvSpPr>
+        <p:spPr/>
+      </p:sp>
+      <p:sp>
+        <p:nvSpPr>
+          <p:cNvPr id="3" name="Notes Placeholder 2">
+            <a:extLst>
+              <a:ext uri="{FF2B5EF4-FFF2-40B4-BE49-F238E27FC236}">
+                <a16:creationId xmlns:a16="http://schemas.microsoft.com/office/drawing/2014/main" id="{BA26D72D-A418-D53F-60CB-B2D76515911E}"/>
+              </a:ext>
+            </a:extLst>
+          </p:cNvPr>
+          <p:cNvSpPr>
+            <a:spLocks noGrp="1"/>
+          </p:cNvSpPr>
+          <p:nvPr>
+            <p:ph type="body" idx="1"/>
+          </p:nvPr>
+        </p:nvSpPr>
+        <p:spPr/>
+        <p:txBody>
+          <a:bodyPr/>
+          <a:lstStyle/>
+          <a:p>
+            <a:r>
+              <a:rPr lang="en-US" dirty="0"/>
+              <a:t>Three reasons, and the third is the one that turns fear into a budget line.</a:t>
+            </a:r>
+          </a:p>
+        </p:txBody>
+      </p:sp>
+      <p:sp>
+        <p:nvSpPr>
+          <p:cNvPr id="4" name="Slide Number Placeholder 3">
+            <a:extLst>
+              <a:ext uri="{FF2B5EF4-FFF2-40B4-BE49-F238E27FC236}">
+                <a16:creationId xmlns:a16="http://schemas.microsoft.com/office/drawing/2014/main" id="{BD7675EC-FDA9-BE94-7480-7530D0E13A36}"/>
+              </a:ext>
+            </a:extLst>
+          </p:cNvPr>
+          <p:cNvSpPr>
+            <a:spLocks noGrp="1"/>
+          </p:cNvSpPr>
+          <p:nvPr>
+            <p:ph type="sldNum" sz="quarter" idx="10"/>
+          </p:nvPr>
+        </p:nvSpPr>
+        <p:spPr/>
+        <p:txBody>
+          <a:bodyPr/>
+          <a:lstStyle/>
+          <a:p>
+            <a:fld id="{F7021451-1387-4CA6-816F-3879F97B5CBC}" type="slidenum">
+              <a:rPr lang="en-US"/>
+              <a:t>11</a:t>
+            </a:fld>
+            <a:endParaRPr lang="en-US"/>
+          </a:p>
+        </p:txBody>
+      </p:sp>
+    </p:spTree>
+    <p:extLst>
+      <p:ext uri="{BB962C8B-B14F-4D97-AF65-F5344CB8AC3E}">
+        <p14:creationId xmlns:p14="http://schemas.microsoft.com/office/powerpoint/2010/main" val="2623975808"/>
+      </p:ext>
+    </p:extLst>
+  </p:cSld>
+  <p:clrMapOvr>
+    <a:masterClrMapping/>
+  </p:clrMapOvr>
+</p:notes>
+</file>
+
+<file path=ppt/notesSlides/notesSlide12.xml><?xml version="1.0" encoding="utf-8"?>
+<p:notes xmlns:a="http://schemas.openxmlformats.org/drawingml/2006/main" xmlns:r="http://schemas.openxmlformats.org/officeDocument/2006/relationships" xmlns:p="http://schemas.openxmlformats.org/presentationml/2006/main">
+  <p:cSld>
+    <p:spTree>
+      <p:nvGrpSpPr>
+        <p:cNvPr id="1" name="">
+          <a:extLst>
+            <a:ext uri="{FF2B5EF4-FFF2-40B4-BE49-F238E27FC236}">
+              <a16:creationId xmlns:a16="http://schemas.microsoft.com/office/drawing/2014/main" id="{C6102E61-D319-E8F1-C61C-56FBD306C591}"/>
+            </a:ext>
+          </a:extLst>
+        </p:cNvPr>
+        <p:cNvGrpSpPr/>
+        <p:nvPr/>
+      </p:nvGrpSpPr>
+      <p:grpSpPr>
+        <a:xfrm>
+          <a:off x="0" y="0"/>
+          <a:ext cx="0" cy="0"/>
+          <a:chOff x="0" y="0"/>
+          <a:chExt cx="0" cy="0"/>
+        </a:xfrm>
+      </p:grpSpPr>
+      <p:sp>
+        <p:nvSpPr>
+          <p:cNvPr id="2" name="Slide Image Placeholder 1">
+            <a:extLst>
+              <a:ext uri="{FF2B5EF4-FFF2-40B4-BE49-F238E27FC236}">
+                <a16:creationId xmlns:a16="http://schemas.microsoft.com/office/drawing/2014/main" id="{C709E907-2F15-9DC0-1286-6EC7E59E9077}"/>
+              </a:ext>
+            </a:extLst>
+          </p:cNvPr>
+          <p:cNvSpPr>
+            <a:spLocks noGrp="1" noRot="1" noChangeAspect="1"/>
+          </p:cNvSpPr>
+          <p:nvPr>
+            <p:ph type="sldImg"/>
+          </p:nvPr>
+        </p:nvSpPr>
+        <p:spPr/>
+      </p:sp>
+      <p:sp>
+        <p:nvSpPr>
+          <p:cNvPr id="3" name="Notes Placeholder 2">
+            <a:extLst>
+              <a:ext uri="{FF2B5EF4-FFF2-40B4-BE49-F238E27FC236}">
+                <a16:creationId xmlns:a16="http://schemas.microsoft.com/office/drawing/2014/main" id="{B5391E2D-0896-1F3D-5855-6529120F9221}"/>
+              </a:ext>
+            </a:extLst>
+          </p:cNvPr>
+          <p:cNvSpPr>
+            <a:spLocks noGrp="1"/>
+          </p:cNvSpPr>
+          <p:nvPr>
+            <p:ph type="body" idx="1"/>
+          </p:nvPr>
+        </p:nvSpPr>
+        <p:spPr/>
+        <p:txBody>
+          <a:bodyPr/>
+          <a:lstStyle/>
+          <a:p>
+            <a:r>
+              <a:rPr lang="en-US" dirty="0"/>
+              <a:t>Three reasons, and the third is the one that turns fear into a budget line.</a:t>
+            </a:r>
+          </a:p>
+        </p:txBody>
+      </p:sp>
+      <p:sp>
+        <p:nvSpPr>
+          <p:cNvPr id="4" name="Slide Number Placeholder 3">
+            <a:extLst>
+              <a:ext uri="{FF2B5EF4-FFF2-40B4-BE49-F238E27FC236}">
+                <a16:creationId xmlns:a16="http://schemas.microsoft.com/office/drawing/2014/main" id="{0B90A36C-EEBF-453F-1906-1012955B7C87}"/>
+              </a:ext>
+            </a:extLst>
+          </p:cNvPr>
+          <p:cNvSpPr>
+            <a:spLocks noGrp="1"/>
+          </p:cNvSpPr>
+          <p:nvPr>
+            <p:ph type="sldNum" sz="quarter" idx="10"/>
+          </p:nvPr>
+        </p:nvSpPr>
+        <p:spPr/>
+        <p:txBody>
+          <a:bodyPr/>
+          <a:lstStyle/>
+          <a:p>
+            <a:fld id="{F7021451-1387-4CA6-816F-3879F97B5CBC}" type="slidenum">
+              <a:rPr lang="en-US"/>
+              <a:t>12</a:t>
+            </a:fld>
+            <a:endParaRPr lang="en-US"/>
+          </a:p>
+        </p:txBody>
+      </p:sp>
+    </p:spTree>
+    <p:extLst>
+      <p:ext uri="{BB962C8B-B14F-4D97-AF65-F5344CB8AC3E}">
+        <p14:creationId xmlns:p14="http://schemas.microsoft.com/office/powerpoint/2010/main" val="3299900890"/>
+      </p:ext>
+    </p:extLst>
+  </p:cSld>
+  <p:clrMapOvr>
+    <a:masterClrMapping/>
+  </p:clrMapOvr>
+</p:notes>
+</file>
+
+<file path=ppt/notesSlides/notesSlide13.xml><?xml version="1.0" encoding="utf-8"?>
+<p:notes xmlns:a="http://schemas.openxmlformats.org/drawingml/2006/main" xmlns:r="http://schemas.openxmlformats.org/officeDocument/2006/relationships" xmlns:p="http://schemas.openxmlformats.org/presentationml/2006/main">
+  <p:cSld>
+    <p:spTree>
+      <p:nvGrpSpPr>
         <p:cNvPr id="1" name=""/>
         <p:cNvGrpSpPr/>
         <p:nvPr/>
@@ -516,7 +737,7 @@
           <a:p>
             <a:fld id="{F7021451-1387-4CA6-816F-3879F97B5CBC}" type="slidenum">
               <a:rPr lang="en-US"/>
-              <a:t>11</a:t>
+              <a:t>13</a:t>
             </a:fld>
             <a:endParaRPr lang="en-US"/>
           </a:p>
@@ -535,7 +756,7 @@
 </p:notes>
 </file>
 
-<file path=ppt/notesSlides/notesSlide12.xml><?xml version="1.0" encoding="utf-8"?>
+<file path=ppt/notesSlides/notesSlide14.xml><?xml version="1.0" encoding="utf-8"?>
 <p:notes xmlns:a="http://schemas.openxmlformats.org/drawingml/2006/main" xmlns:r="http://schemas.openxmlformats.org/officeDocument/2006/relationships" xmlns:p="http://schemas.openxmlformats.org/presentationml/2006/main">
   <p:cSld>
     <p:spTree>
@@ -627,7 +848,7 @@
           <a:p>
             <a:fld id="{F7021451-1387-4CA6-816F-3879F97B5CBC}" type="slidenum">
               <a:rPr lang="en-US"/>
-              <a:t>12</a:t>
+              <a:t>14</a:t>
             </a:fld>
             <a:endParaRPr lang="en-US"/>
           </a:p>
@@ -646,118 +867,7 @@
 </p:notes>
 </file>
 
-<file path=ppt/notesSlides/notesSlide13.xml><?xml version="1.0" encoding="utf-8"?>
-<p:notes xmlns:a="http://schemas.openxmlformats.org/drawingml/2006/main" xmlns:r="http://schemas.openxmlformats.org/officeDocument/2006/relationships" xmlns:p="http://schemas.openxmlformats.org/presentationml/2006/main">
-  <p:cSld>
-    <p:spTree>
-      <p:nvGrpSpPr>
-        <p:cNvPr id="1" name="">
-          <a:extLst>
-            <a:ext uri="{FF2B5EF4-FFF2-40B4-BE49-F238E27FC236}">
-              <a16:creationId xmlns:a16="http://schemas.microsoft.com/office/drawing/2014/main" id="{17958F3E-868D-7028-898F-798AD4F94774}"/>
-            </a:ext>
-          </a:extLst>
-        </p:cNvPr>
-        <p:cNvGrpSpPr/>
-        <p:nvPr/>
-      </p:nvGrpSpPr>
-      <p:grpSpPr>
-        <a:xfrm>
-          <a:off x="0" y="0"/>
-          <a:ext cx="0" cy="0"/>
-          <a:chOff x="0" y="0"/>
-          <a:chExt cx="0" cy="0"/>
-        </a:xfrm>
-      </p:grpSpPr>
-      <p:sp>
-        <p:nvSpPr>
-          <p:cNvPr id="2" name="Slide Image Placeholder 1">
-            <a:extLst>
-              <a:ext uri="{FF2B5EF4-FFF2-40B4-BE49-F238E27FC236}">
-                <a16:creationId xmlns:a16="http://schemas.microsoft.com/office/drawing/2014/main" id="{6A794548-E07E-E87D-2BC6-DF8A605DC6FB}"/>
-              </a:ext>
-            </a:extLst>
-          </p:cNvPr>
-          <p:cNvSpPr>
-            <a:spLocks noGrp="1" noRot="1" noChangeAspect="1"/>
-          </p:cNvSpPr>
-          <p:nvPr>
-            <p:ph type="sldImg"/>
-          </p:nvPr>
-        </p:nvSpPr>
-        <p:spPr/>
-      </p:sp>
-      <p:sp>
-        <p:nvSpPr>
-          <p:cNvPr id="3" name="Notes Placeholder 2">
-            <a:extLst>
-              <a:ext uri="{FF2B5EF4-FFF2-40B4-BE49-F238E27FC236}">
-                <a16:creationId xmlns:a16="http://schemas.microsoft.com/office/drawing/2014/main" id="{7457756F-6ECF-4257-9C88-CE589804B71A}"/>
-              </a:ext>
-            </a:extLst>
-          </p:cNvPr>
-          <p:cNvSpPr>
-            <a:spLocks noGrp="1"/>
-          </p:cNvSpPr>
-          <p:nvPr>
-            <p:ph type="body" idx="1"/>
-          </p:nvPr>
-        </p:nvSpPr>
-        <p:spPr/>
-        <p:txBody>
-          <a:bodyPr/>
-          <a:lstStyle/>
-          <a:p>
-            <a:r>
-              <a:rPr lang="en-US" dirty="0"/>
-              <a:t>The slide people photograph. The years are doing argumentative work: 2004 and 2018 are what make 'reading was expensive back then' credible later. Pause here.</a:t>
-            </a:r>
-          </a:p>
-        </p:txBody>
-      </p:sp>
-      <p:sp>
-        <p:nvSpPr>
-          <p:cNvPr id="4" name="Slide Number Placeholder 3">
-            <a:extLst>
-              <a:ext uri="{FF2B5EF4-FFF2-40B4-BE49-F238E27FC236}">
-                <a16:creationId xmlns:a16="http://schemas.microsoft.com/office/drawing/2014/main" id="{EF1FF01B-DEFC-B3C6-0857-01416C539FFF}"/>
-              </a:ext>
-            </a:extLst>
-          </p:cNvPr>
-          <p:cNvSpPr>
-            <a:spLocks noGrp="1"/>
-          </p:cNvSpPr>
-          <p:nvPr>
-            <p:ph type="sldNum" sz="quarter" idx="10"/>
-          </p:nvPr>
-        </p:nvSpPr>
-        <p:spPr/>
-        <p:txBody>
-          <a:bodyPr/>
-          <a:lstStyle/>
-          <a:p>
-            <a:fld id="{F7021451-1387-4CA6-816F-3879F97B5CBC}" type="slidenum">
-              <a:rPr lang="en-US"/>
-              <a:t>13</a:t>
-            </a:fld>
-            <a:endParaRPr lang="en-US"/>
-          </a:p>
-        </p:txBody>
-      </p:sp>
-    </p:spTree>
-    <p:extLst>
-      <p:ext uri="{BB962C8B-B14F-4D97-AF65-F5344CB8AC3E}">
-        <p14:creationId xmlns:p14="http://schemas.microsoft.com/office/powerpoint/2010/main" val="1033423986"/>
-      </p:ext>
-    </p:extLst>
-  </p:cSld>
-  <p:clrMapOvr>
-    <a:masterClrMapping/>
-  </p:clrMapOvr>
-</p:notes>
-</file>
-
-<file path=ppt/notesSlides/notesSlide14.xml><?xml version="1.0" encoding="utf-8"?>
+<file path=ppt/notesSlides/notesSlide15.xml><?xml version="1.0" encoding="utf-8"?>
 <p:notes xmlns:a="http://schemas.openxmlformats.org/drawingml/2006/main" xmlns:r="http://schemas.openxmlformats.org/officeDocument/2006/relationships" xmlns:p="http://schemas.openxmlformats.org/presentationml/2006/main">
   <p:cSld>
     <p:spTree>
@@ -849,7 +959,7 @@
           <a:p>
             <a:fld id="{F7021451-1387-4CA6-816F-3879F97B5CBC}" type="slidenum">
               <a:rPr lang="en-US"/>
-              <a:t>14</a:t>
+              <a:t>15</a:t>
             </a:fld>
             <a:endParaRPr lang="en-US"/>
           </a:p>
@@ -859,93 +969,6 @@
     <p:extLst>
       <p:ext uri="{BB962C8B-B14F-4D97-AF65-F5344CB8AC3E}">
         <p14:creationId xmlns:p14="http://schemas.microsoft.com/office/powerpoint/2010/main" val="1883126449"/>
-      </p:ext>
-    </p:extLst>
-  </p:cSld>
-  <p:clrMapOvr>
-    <a:masterClrMapping/>
-  </p:clrMapOvr>
-</p:notes>
-</file>
-
-<file path=ppt/notesSlides/notesSlide15.xml><?xml version="1.0" encoding="utf-8"?>
-<p:notes xmlns:a="http://schemas.openxmlformats.org/drawingml/2006/main" xmlns:r="http://schemas.openxmlformats.org/officeDocument/2006/relationships" xmlns:p="http://schemas.openxmlformats.org/presentationml/2006/main">
-  <p:cSld>
-    <p:spTree>
-      <p:nvGrpSpPr>
-        <p:cNvPr id="1" name=""/>
-        <p:cNvGrpSpPr/>
-        <p:nvPr/>
-      </p:nvGrpSpPr>
-      <p:grpSpPr>
-        <a:xfrm>
-          <a:off x="0" y="0"/>
-          <a:ext cx="0" cy="0"/>
-          <a:chOff x="0" y="0"/>
-          <a:chExt cx="0" cy="0"/>
-        </a:xfrm>
-      </p:grpSpPr>
-      <p:sp>
-        <p:nvSpPr>
-          <p:cNvPr id="2" name="Slide Image Placeholder 1"/>
-          <p:cNvSpPr>
-            <a:spLocks noGrp="1" noRot="1" noChangeAspect="1"/>
-          </p:cNvSpPr>
-          <p:nvPr>
-            <p:ph type="sldImg"/>
-          </p:nvPr>
-        </p:nvSpPr>
-        <p:spPr/>
-      </p:sp>
-      <p:sp>
-        <p:nvSpPr>
-          <p:cNvPr id="3" name="Notes Placeholder 2"/>
-          <p:cNvSpPr>
-            <a:spLocks noGrp="1"/>
-          </p:cNvSpPr>
-          <p:nvPr>
-            <p:ph type="body" idx="1"/>
-          </p:nvPr>
-        </p:nvSpPr>
-        <p:spPr/>
-        <p:txBody>
-          <a:bodyPr/>
-          <a:lstStyle/>
-          <a:p>
-            <a:r>
-              <a:rPr lang="en-US" dirty="0"/>
-              <a:t>Changes made without understanding lead to instability. Instability wakes us at 2am and can surface to the customer. Getting risk low is expensive.</a:t>
-            </a:r>
-          </a:p>
-        </p:txBody>
-      </p:sp>
-      <p:sp>
-        <p:nvSpPr>
-          <p:cNvPr id="4" name="Slide Number Placeholder 3"/>
-          <p:cNvSpPr>
-            <a:spLocks noGrp="1"/>
-          </p:cNvSpPr>
-          <p:nvPr>
-            <p:ph type="sldNum" sz="quarter" idx="10"/>
-          </p:nvPr>
-        </p:nvSpPr>
-        <p:spPr/>
-        <p:txBody>
-          <a:bodyPr/>
-          <a:lstStyle/>
-          <a:p>
-            <a:fld id="{F7021451-1387-4CA6-816F-3879F97B5CBC}" type="slidenum">
-              <a:rPr lang="en-US"/>
-              <a:t>15</a:t>
-            </a:fld>
-            <a:endParaRPr lang="en-US"/>
-          </a:p>
-        </p:txBody>
-      </p:sp>
-    </p:spTree>
-    <p:extLst>
-      <p:ext uri="{BB962C8B-B14F-4D97-AF65-F5344CB8AC3E}">
-        <p14:creationId xmlns:p14="http://schemas.microsoft.com/office/powerpoint/2010/main" val="1024086991"/>
       </p:ext>
     </p:extLst>
   </p:cSld>
@@ -1001,7 +1024,7 @@
           <a:p>
             <a:r>
               <a:rPr lang="en-US" dirty="0"/>
-              <a:t>Second and last showing. Same asset. Nobody was careless — the definition they were working from has an unresolved word in it. Decide in the dry run whether you talk over this or stay silent. Not both.</a:t>
+              <a:t>Changes made without understanding lead to instability. Instability wakes us at 2am and can surface to the customer. Getting risk low is expensive.</a:t>
             </a:r>
           </a:p>
         </p:txBody>
@@ -1088,7 +1111,7 @@
           <a:p>
             <a:r>
               <a:rPr lang="en-US" dirty="0"/>
-              <a:t>Webster. Say the source out loud.</a:t>
+              <a:t>Second and last showing. Same asset. Nobody was careless — the definition they were working from has an unresolved word in it. Decide in the dry run whether you talk over this or stay silent. Not both.</a:t>
             </a:r>
           </a:p>
         </p:txBody>
@@ -1175,7 +1198,7 @@
           <a:p>
             <a:r>
               <a:rPr lang="en-US" dirty="0"/>
-              <a:t>Adapted from ISO/IEC/IEEE 29148:2018 — say that out loud; it is adapted, not quoted.</a:t>
+              <a:t>Webster. Say the source out loud.</a:t>
             </a:r>
           </a:p>
         </p:txBody>
@@ -1262,7 +1285,7 @@
           <a:p>
             <a:r>
               <a:rPr lang="en-US" dirty="0"/>
-              <a:t>In a greenfield app we're handed a definition of correct. In a legacy app the external spec has been stale for years, so getting to it is archaeology.</a:t>
+              <a:t>Adapted from ISO/IEC/IEEE 29148:2018 — say that out loud; it is adapted, not quoted.</a:t>
             </a:r>
           </a:p>
         </p:txBody>
@@ -1436,7 +1459,7 @@
           <a:p>
             <a:r>
               <a:rPr lang="en-US" dirty="0"/>
-              <a:t>Say 'Hyrum's Law' out loud and stop there. Usage quietly promotes your implementation into your interface. You will never have the list of who is standing on what.</a:t>
+              <a:t>In a greenfield app we're handed a definition of correct. In a legacy app the external spec has been stale for years, so getting to it is archaeology.</a:t>
             </a:r>
           </a:p>
         </p:txBody>
@@ -1523,7 +1546,7 @@
           <a:p>
             <a:r>
               <a:rPr lang="en-US" dirty="0"/>
-              <a:t>Fowler's definition of refactoring. The canonical definition already has the answer in it.</a:t>
+              <a:t>Say 'Hyrum's Law' out loud and stop there. Usage quietly promotes your implementation into your interface. You will never have the list of who is standing on what.</a:t>
             </a:r>
           </a:p>
         </p:txBody>
@@ -1610,7 +1633,7 @@
           <a:p>
             <a:r>
               <a:rPr lang="en-US" dirty="0"/>
-              <a:t>Which has a hole in it exactly where I need it solid. Don't narrate over the drop.</a:t>
+              <a:t>Anything watching the database sees every write; most are incidental. Anything downstream sees a handful, and those are the ones that matter. The exception is the behavior nobody is standing on because it's the thing they're complaining about — nobody depends on this app deadlocking.</a:t>
             </a:r>
           </a:p>
         </p:txBody>
@@ -1656,7 +1679,13 @@
   <p:cSld>
     <p:spTree>
       <p:nvGrpSpPr>
-        <p:cNvPr id="1" name=""/>
+        <p:cNvPr id="1" name="">
+          <a:extLst>
+            <a:ext uri="{FF2B5EF4-FFF2-40B4-BE49-F238E27FC236}">
+              <a16:creationId xmlns:a16="http://schemas.microsoft.com/office/drawing/2014/main" id="{30C1E16E-E2B5-5702-361F-50B1B32523EA}"/>
+            </a:ext>
+          </a:extLst>
+        </p:cNvPr>
         <p:cNvGrpSpPr/>
         <p:nvPr/>
       </p:nvGrpSpPr>
@@ -1670,7 +1699,13 @@
       </p:grpSpPr>
       <p:sp>
         <p:nvSpPr>
-          <p:cNvPr id="2" name="Slide Image Placeholder 1"/>
+          <p:cNvPr id="2" name="Slide Image Placeholder 1">
+            <a:extLst>
+              <a:ext uri="{FF2B5EF4-FFF2-40B4-BE49-F238E27FC236}">
+                <a16:creationId xmlns:a16="http://schemas.microsoft.com/office/drawing/2014/main" id="{7B804179-5299-9014-BE23-E0378B0C1E17}"/>
+              </a:ext>
+            </a:extLst>
+          </p:cNvPr>
           <p:cNvSpPr>
             <a:spLocks noGrp="1" noRot="1" noChangeAspect="1"/>
           </p:cNvSpPr>
@@ -1682,7 +1717,13 @@
       </p:sp>
       <p:sp>
         <p:nvSpPr>
-          <p:cNvPr id="3" name="Notes Placeholder 2"/>
+          <p:cNvPr id="3" name="Notes Placeholder 2">
+            <a:extLst>
+              <a:ext uri="{FF2B5EF4-FFF2-40B4-BE49-F238E27FC236}">
+                <a16:creationId xmlns:a16="http://schemas.microsoft.com/office/drawing/2014/main" id="{91814B1E-C899-AD10-4258-955EC7BB4A3E}"/>
+              </a:ext>
+            </a:extLst>
+          </p:cNvPr>
           <p:cNvSpPr>
             <a:spLocks noGrp="1"/>
           </p:cNvSpPr>
@@ -1697,14 +1738,20 @@
           <a:p>
             <a:r>
               <a:rPr lang="en-US" dirty="0"/>
-              <a:t>Anything watching the database sees every write; most are incidental. Anything downstream sees a handful, and those are the ones that matter. The exception is the behavior nobody is standing on because it's the thing they're complaining about — nobody depends on this app deadlocking.</a:t>
-            </a:r>
-          </a:p>
-        </p:txBody>
-      </p:sp>
-      <p:sp>
-        <p:nvSpPr>
-          <p:cNvPr id="4" name="Slide Number Placeholder 3"/>
+              <a:t>Adapted from ISO/IEC/IEEE 29148:2018 — say that out loud; it is adapted, not quoted.</a:t>
+            </a:r>
+          </a:p>
+        </p:txBody>
+      </p:sp>
+      <p:sp>
+        <p:nvSpPr>
+          <p:cNvPr id="4" name="Slide Number Placeholder 3">
+            <a:extLst>
+              <a:ext uri="{FF2B5EF4-FFF2-40B4-BE49-F238E27FC236}">
+                <a16:creationId xmlns:a16="http://schemas.microsoft.com/office/drawing/2014/main" id="{96217B13-35C5-3B69-B771-05E75824701D}"/>
+              </a:ext>
+            </a:extLst>
+          </p:cNvPr>
           <p:cNvSpPr>
             <a:spLocks noGrp="1"/>
           </p:cNvSpPr>
@@ -1728,7 +1775,7 @@
     </p:spTree>
     <p:extLst>
       <p:ext uri="{BB962C8B-B14F-4D97-AF65-F5344CB8AC3E}">
-        <p14:creationId xmlns:p14="http://schemas.microsoft.com/office/powerpoint/2010/main" val="1024086991"/>
+        <p14:creationId xmlns:p14="http://schemas.microsoft.com/office/powerpoint/2010/main" val="2117346396"/>
       </p:ext>
     </p:extLst>
   </p:cSld>
@@ -1784,7 +1831,7 @@
           <a:p>
             <a:r>
               <a:rPr lang="en-US" dirty="0"/>
-              <a:t>Defined once, here. Same words every time it comes back — the repetition is what makes it portable. This is the understanding that is expensive to recover.</a:t>
+              <a:t>Show the whole list at once. Say three. End on 48 and stop — that number is the handoff. Never say the magic-integer values.</a:t>
             </a:r>
           </a:p>
         </p:txBody>
@@ -1871,7 +1918,7 @@
           <a:p>
             <a:r>
               <a:rPr lang="en-US" dirty="0"/>
-              <a:t>Show the whole list at once. Say three. End on 48 and stop — that number is the handoff. Never say the magic-integer values.</a:t>
+              <a:t>Hermans, The Programmer's Brain, 2021. Three confusions: lack of knowledge, lack of information, lack of processing power. Mine was the third, with the second underneath it — a 464-line median is information that isn't in front of you. Do NOT say I didn't have an issue with the first two. Thirty seconds, then move.</a:t>
             </a:r>
           </a:p>
         </p:txBody>
@@ -1958,7 +2005,7 @@
           <a:p>
             <a:r>
               <a:rPr lang="en-US" dirty="0"/>
-              <a:t>Hermans, The Programmer's Brain, 2021. Three confusions: lack of knowledge, lack of information, lack of processing power. Mine was the third, with the second underneath it — a 464-line median is information that isn't in front of you. Do NOT say I didn't have an issue with the first two. Thirty seconds, then move.</a:t>
+              <a:t>I like determinism. LLMs are probabilistic. So how do you get high-quality code out of one — wrong question. I wasn't asking it to write production code. I was asking it to read code.</a:t>
             </a:r>
           </a:p>
         </p:txBody>
@@ -2045,7 +2092,7 @@
           <a:p>
             <a:r>
               <a:rPr lang="en-US" dirty="0"/>
-              <a:t>I like determinism. LLMs are probabilistic. So how do you get high-quality code out of one — wrong question. I wasn't asking it to write production code. I was asking it to read code.</a:t>
+              <a:t>The honest claim: planning, not tickets, not started. It is smaller than the room expects and saying so is the credibility play. The confidence brought the greenlight — not the artifacts.</a:t>
             </a:r>
           </a:p>
         </p:txBody>
@@ -2132,7 +2179,7 @@
           <a:p>
             <a:r>
               <a:rPr lang="en-US" dirty="0"/>
-              <a:t>The honest claim: planning, not tickets, not started. It is smaller than the room expects and saying so is the credibility play. The confidence brought the greenlight — not the artifacts.</a:t>
+              <a:t>Feathers' term. What changed since 2004 is that we can prompt our way there. Q&amp;A backstop: a characterization test records everything the code does; the spec is the part somebody else is standing on.</a:t>
             </a:r>
           </a:p>
         </p:txBody>
@@ -2219,7 +2266,7 @@
           <a:p>
             <a:r>
               <a:rPr lang="en-US" dirty="0"/>
-              <a:t>Feathers' term. What changed since 2004 is that we can prompt our way there. Q&amp;A backstop: a characterization test records everything the code does; the spec is the part somebody else is standing on.</a:t>
+              <a:t>Create a new branch first. Step 2 is the first checkpoint and it is not optional — read these.</a:t>
             </a:r>
           </a:p>
         </p:txBody>
@@ -2393,7 +2440,7 @@
           <a:p>
             <a:r>
               <a:rPr lang="en-US" dirty="0"/>
-              <a:t>Create a new branch first. Step 2 is the first checkpoint and it is not optional — read these.</a:t>
+              <a:t>A test is only as good as the data you give it. If you have no record of real inputs, getting one is your first step — happy to go into options in Q&amp;A. Where the tests and the business disagree you have probably found a bug, and probably one something else depends on. Note it; don't let it drive a change.</a:t>
             </a:r>
           </a:p>
         </p:txBody>
@@ -2480,7 +2527,7 @@
           <a:p>
             <a:r>
               <a:rPr lang="en-US" dirty="0"/>
-              <a:t>A test is only as good as the data you give it. If you have no record of real inputs, getting one is your first step — happy to go into options in Q&amp;A. Where the tests and the business disagree you have probably found a bug, and probably one something else depends on. Note it; don't let it drive a change.</a:t>
+              <a:t>Full screen so the room can photograph it. One of the two things people actually take home. Stop talking and let them shoot it.</a:t>
             </a:r>
           </a:p>
         </p:txBody>
@@ -2567,7 +2614,7 @@
           <a:p>
             <a:r>
               <a:rPr lang="en-US" dirty="0"/>
-              <a:t>Full screen so the room can photograph it. One of the two things people actually take home. Stop talking and let them shoot it.</a:t>
+              <a:t>Callback, same words. This is what the suite and the spec document are for.</a:t>
             </a:r>
           </a:p>
         </p:txBody>
@@ -2654,7 +2701,7 @@
           <a:p>
             <a:r>
               <a:rPr lang="en-US" dirty="0"/>
-              <a:t>Callback, same words. This is what the suite and the spec document are for.</a:t>
+              <a:t>Neutral wording on 02 — the probe has not been run. I'm going to let the agent execute these, but the agent's real value was in step 3, not step 6.</a:t>
             </a:r>
           </a:p>
         </p:txBody>
@@ -2741,7 +2788,7 @@
           <a:p>
             <a:r>
               <a:rPr lang="en-US" dirty="0"/>
-              <a:t>Neutral wording on 02 — the probe has not been run. I'm going to let the agent execute these, but the agent's real value was in step 3, not step 6.</a:t>
+              <a:t>Say which one happened, not which one you expected. If the probe is inconclusive, cut to one refactor plus the bugfix and delete this slide.</a:t>
             </a:r>
           </a:p>
         </p:txBody>
@@ -2828,7 +2875,7 @@
           <a:p>
             <a:r>
               <a:rPr lang="en-US" dirty="0"/>
-              <a:t>Say which one happened, not which one you expected. If the probe is inconclusive, cut to one refactor plus the bugfix and delete this slide.</a:t>
+              <a:t>This codebase is small and these changes are small — but I've used this at greater scale across much larger cross-cutting codebases. Is AI the silver bullet? No. It took the most expensive step in the canon and made it affordable.</a:t>
             </a:r>
           </a:p>
         </p:txBody>
@@ -2915,7 +2962,7 @@
           <a:p>
             <a:r>
               <a:rPr lang="en-US" dirty="0"/>
-              <a:t>This codebase is small and these changes are small — but I've used this at greater scale across much larger cross-cutting codebases. Is AI the silver bullet? No. It took the most expensive step in the canon and made it affordable.</a:t>
+              <a:t>NOT WRITTEN. Do not improvise this on the day. The last slide is the one that gets photographed and quoted.</a:t>
             </a:r>
           </a:p>
         </p:txBody>
@@ -3002,7 +3049,7 @@
           <a:p>
             <a:r>
               <a:rPr lang="en-US" dirty="0"/>
-              <a:t>NOT WRITTEN. Do not improvise this on the day. The last slide is the one that gets photographed and quoted.</a:t>
+              <a:t>Takeaway plus QR is the last thing on screen. No thank-you slide, no questions slide.</a:t>
             </a:r>
           </a:p>
         </p:txBody>
@@ -3025,93 +3072,6 @@
             <a:fld id="{F7021451-1387-4CA6-816F-3879F97B5CBC}" type="slidenum">
               <a:rPr lang="en-US"/>
               <a:t>37</a:t>
-            </a:fld>
-            <a:endParaRPr lang="en-US"/>
-          </a:p>
-        </p:txBody>
-      </p:sp>
-    </p:spTree>
-    <p:extLst>
-      <p:ext uri="{BB962C8B-B14F-4D97-AF65-F5344CB8AC3E}">
-        <p14:creationId xmlns:p14="http://schemas.microsoft.com/office/powerpoint/2010/main" val="1024086991"/>
-      </p:ext>
-    </p:extLst>
-  </p:cSld>
-  <p:clrMapOvr>
-    <a:masterClrMapping/>
-  </p:clrMapOvr>
-</p:notes>
-</file>
-
-<file path=ppt/notesSlides/notesSlide38.xml><?xml version="1.0" encoding="utf-8"?>
-<p:notes xmlns:a="http://schemas.openxmlformats.org/drawingml/2006/main" xmlns:r="http://schemas.openxmlformats.org/officeDocument/2006/relationships" xmlns:p="http://schemas.openxmlformats.org/presentationml/2006/main">
-  <p:cSld>
-    <p:spTree>
-      <p:nvGrpSpPr>
-        <p:cNvPr id="1" name=""/>
-        <p:cNvGrpSpPr/>
-        <p:nvPr/>
-      </p:nvGrpSpPr>
-      <p:grpSpPr>
-        <a:xfrm>
-          <a:off x="0" y="0"/>
-          <a:ext cx="0" cy="0"/>
-          <a:chOff x="0" y="0"/>
-          <a:chExt cx="0" cy="0"/>
-        </a:xfrm>
-      </p:grpSpPr>
-      <p:sp>
-        <p:nvSpPr>
-          <p:cNvPr id="2" name="Slide Image Placeholder 1"/>
-          <p:cNvSpPr>
-            <a:spLocks noGrp="1" noRot="1" noChangeAspect="1"/>
-          </p:cNvSpPr>
-          <p:nvPr>
-            <p:ph type="sldImg"/>
-          </p:nvPr>
-        </p:nvSpPr>
-        <p:spPr/>
-      </p:sp>
-      <p:sp>
-        <p:nvSpPr>
-          <p:cNvPr id="3" name="Notes Placeholder 2"/>
-          <p:cNvSpPr>
-            <a:spLocks noGrp="1"/>
-          </p:cNvSpPr>
-          <p:nvPr>
-            <p:ph type="body" idx="1"/>
-          </p:nvPr>
-        </p:nvSpPr>
-        <p:spPr/>
-        <p:txBody>
-          <a:bodyPr/>
-          <a:lstStyle/>
-          <a:p>
-            <a:r>
-              <a:rPr lang="en-US" dirty="0"/>
-              <a:t>Takeaway plus QR is the last thing on screen. No thank-you slide, no questions slide.</a:t>
-            </a:r>
-          </a:p>
-        </p:txBody>
-      </p:sp>
-      <p:sp>
-        <p:nvSpPr>
-          <p:cNvPr id="4" name="Slide Number Placeholder 3"/>
-          <p:cNvSpPr>
-            <a:spLocks noGrp="1"/>
-          </p:cNvSpPr>
-          <p:nvPr>
-            <p:ph type="sldNum" sz="quarter" idx="10"/>
-          </p:nvPr>
-        </p:nvSpPr>
-        <p:spPr/>
-        <p:txBody>
-          <a:bodyPr/>
-          <a:lstStyle/>
-          <a:p>
-            <a:fld id="{F7021451-1387-4CA6-816F-3879F97B5CBC}" type="slidenum">
-              <a:rPr lang="en-US"/>
-              <a:t>38</a:t>
             </a:fld>
             <a:endParaRPr lang="en-US"/>
           </a:p>
@@ -4300,94 +4260,6 @@
           </a:p>
         </p:txBody>
       </p:sp>
-      <p:sp>
-        <p:nvSpPr>
-          <p:cNvPr id="5" name="Text 3"/>
-          <p:cNvSpPr/>
-          <p:nvPr/>
-        </p:nvSpPr>
-        <p:spPr>
-          <a:xfrm>
-            <a:off x="1333500" y="5733604"/>
-            <a:ext cx="17183100" cy="687586"/>
-          </a:xfrm>
-          <a:prstGeom prst="rect">
-            <a:avLst/>
-          </a:prstGeom>
-          <a:noFill/>
-          <a:ln/>
-        </p:spPr>
-        <p:txBody>
-          <a:bodyPr wrap="square" lIns="25400" tIns="25400" rIns="25400" bIns="25400" rtlCol="0" anchor="t">
-            <a:normAutofit/>
-          </a:bodyPr>
-          <a:lstStyle/>
-          <a:p>
-            <a:pPr marL="0" indent="0" algn="l">
-              <a:lnSpc>
-                <a:spcPct val="136400"/>
-              </a:lnSpc>
-              <a:buNone/>
-            </a:pPr>
-            <a:r>
-              <a:rPr lang="en-US" sz="3300" dirty="0">
-                <a:solidFill>
-                  <a:srgbClr val="E9E9ED"/>
-                </a:solidFill>
-                <a:latin typeface="Arial" pitchFamily="34" charset="0"/>
-                <a:ea typeface="Arial" pitchFamily="34" charset="-122"/>
-                <a:cs typeface="Arial" pitchFamily="34" charset="-120"/>
-              </a:rPr>
-              <a:t>No tests to protect us in its absence</a:t>
-            </a:r>
-            <a:endParaRPr lang="en-US" sz="3300" dirty="0"/>
-          </a:p>
-        </p:txBody>
-      </p:sp>
-      <p:sp>
-        <p:nvSpPr>
-          <p:cNvPr id="6" name="Text 4"/>
-          <p:cNvSpPr/>
-          <p:nvPr/>
-        </p:nvSpPr>
-        <p:spPr>
-          <a:xfrm>
-            <a:off x="1333500" y="6668839"/>
-            <a:ext cx="17183100" cy="687586"/>
-          </a:xfrm>
-          <a:prstGeom prst="rect">
-            <a:avLst/>
-          </a:prstGeom>
-          <a:noFill/>
-          <a:ln/>
-        </p:spPr>
-        <p:txBody>
-          <a:bodyPr wrap="square" lIns="25400" tIns="25400" rIns="25400" bIns="25400" rtlCol="0" anchor="t">
-            <a:normAutofit/>
-          </a:bodyPr>
-          <a:lstStyle/>
-          <a:p>
-            <a:pPr marL="0" indent="0" algn="l">
-              <a:lnSpc>
-                <a:spcPct val="136400"/>
-              </a:lnSpc>
-              <a:buNone/>
-            </a:pPr>
-            <a:r>
-              <a:rPr lang="en-US" sz="3300" dirty="0">
-                <a:solidFill>
-                  <a:srgbClr val="E9E9ED"/>
-                </a:solidFill>
-                <a:latin typeface="Arial" pitchFamily="34" charset="0"/>
-                <a:ea typeface="Arial" pitchFamily="34" charset="-122"/>
-                <a:cs typeface="Arial" pitchFamily="34" charset="-120"/>
-              </a:rPr>
-              <a:t>Real business cost when we get it wrong</a:t>
-            </a:r>
-            <a:endParaRPr lang="en-US" sz="3300" dirty="0"/>
-          </a:p>
-        </p:txBody>
-      </p:sp>
     </p:spTree>
   </p:cSld>
   <p:clrMapOvr>
@@ -4397,6 +4269,510 @@
 </file>
 
 <file path=ppt/slides/slide11.xml><?xml version="1.0" encoding="utf-8"?>
+<p:sld xmlns:a="http://schemas.openxmlformats.org/drawingml/2006/main" xmlns:r="http://schemas.openxmlformats.org/officeDocument/2006/relationships" xmlns:p="http://schemas.openxmlformats.org/presentationml/2006/main">
+  <p:cSld>
+    <p:bg>
+      <p:bgPr>
+        <a:solidFill>
+          <a:srgbClr val="161826"/>
+        </a:solidFill>
+        <a:effectLst/>
+      </p:bgPr>
+    </p:bg>
+    <p:spTree>
+      <p:nvGrpSpPr>
+        <p:cNvPr id="1" name="">
+          <a:extLst>
+            <a:ext uri="{FF2B5EF4-FFF2-40B4-BE49-F238E27FC236}">
+              <a16:creationId xmlns:a16="http://schemas.microsoft.com/office/drawing/2014/main" id="{F5B7AAE0-E307-BC5B-89C3-5D9762D41AC8}"/>
+            </a:ext>
+          </a:extLst>
+        </p:cNvPr>
+        <p:cNvGrpSpPr/>
+        <p:nvPr/>
+      </p:nvGrpSpPr>
+      <p:grpSpPr>
+        <a:xfrm>
+          <a:off x="0" y="0"/>
+          <a:ext cx="0" cy="0"/>
+          <a:chOff x="0" y="0"/>
+          <a:chExt cx="0" cy="0"/>
+        </a:xfrm>
+      </p:grpSpPr>
+      <p:sp>
+        <p:nvSpPr>
+          <p:cNvPr id="2" name="Shape 0">
+            <a:extLst>
+              <a:ext uri="{FF2B5EF4-FFF2-40B4-BE49-F238E27FC236}">
+                <a16:creationId xmlns:a16="http://schemas.microsoft.com/office/drawing/2014/main" id="{CCB9B3A6-8913-4D16-4B20-BFFEABBC17C9}"/>
+              </a:ext>
+            </a:extLst>
+          </p:cNvPr>
+          <p:cNvSpPr/>
+          <p:nvPr/>
+        </p:nvSpPr>
+        <p:spPr>
+          <a:xfrm>
+            <a:off x="1333500" y="3159026"/>
+            <a:ext cx="533400" cy="28575"/>
+          </a:xfrm>
+          <a:prstGeom prst="rect">
+            <a:avLst/>
+          </a:prstGeom>
+          <a:solidFill>
+            <a:srgbClr val="9184D9"/>
+          </a:solidFill>
+          <a:ln/>
+        </p:spPr>
+        <p:txBody>
+          <a:bodyPr/>
+          <a:lstStyle/>
+          <a:p>
+            <a:endParaRPr lang="en-US"/>
+          </a:p>
+        </p:txBody>
+      </p:sp>
+      <p:sp>
+        <p:nvSpPr>
+          <p:cNvPr id="3" name="Text 1">
+            <a:extLst>
+              <a:ext uri="{FF2B5EF4-FFF2-40B4-BE49-F238E27FC236}">
+                <a16:creationId xmlns:a16="http://schemas.microsoft.com/office/drawing/2014/main" id="{EEE9AF2A-74A4-A65B-FE62-C86BE28F4E33}"/>
+              </a:ext>
+            </a:extLst>
+          </p:cNvPr>
+          <p:cNvSpPr/>
+          <p:nvPr/>
+        </p:nvSpPr>
+        <p:spPr>
+          <a:xfrm>
+            <a:off x="1333500" y="3606701"/>
+            <a:ext cx="17183100" cy="696367"/>
+          </a:xfrm>
+          <a:prstGeom prst="rect">
+            <a:avLst/>
+          </a:prstGeom>
+          <a:noFill/>
+          <a:ln/>
+        </p:spPr>
+        <p:txBody>
+          <a:bodyPr wrap="square" lIns="25400" tIns="25400" rIns="25400" bIns="25400" rtlCol="0" anchor="t">
+            <a:normAutofit lnSpcReduction="10000"/>
+          </a:bodyPr>
+          <a:lstStyle/>
+          <a:p>
+            <a:pPr marL="0" indent="0" algn="l">
+              <a:lnSpc>
+                <a:spcPct val="93405"/>
+              </a:lnSpc>
+              <a:buNone/>
+            </a:pPr>
+            <a:r>
+              <a:rPr lang="en-US" sz="4800" kern="0" spc="-96" dirty="0">
+                <a:solidFill>
+                  <a:srgbClr val="E9E9ED"/>
+                </a:solidFill>
+                <a:latin typeface="Arial" pitchFamily="34" charset="0"/>
+                <a:ea typeface="Arial" pitchFamily="34" charset="-122"/>
+                <a:cs typeface="Arial" pitchFamily="34" charset="-120"/>
+              </a:rPr>
+              <a:t>Why legacy resists change</a:t>
+            </a:r>
+            <a:endParaRPr lang="en-US" sz="4800" dirty="0"/>
+          </a:p>
+        </p:txBody>
+      </p:sp>
+      <p:sp>
+        <p:nvSpPr>
+          <p:cNvPr id="4" name="Text 2">
+            <a:extLst>
+              <a:ext uri="{FF2B5EF4-FFF2-40B4-BE49-F238E27FC236}">
+                <a16:creationId xmlns:a16="http://schemas.microsoft.com/office/drawing/2014/main" id="{6FAA2F00-26BC-AFB7-C1D9-EF4F5C7AB195}"/>
+              </a:ext>
+            </a:extLst>
+          </p:cNvPr>
+          <p:cNvSpPr/>
+          <p:nvPr/>
+        </p:nvSpPr>
+        <p:spPr>
+          <a:xfrm>
+            <a:off x="1333500" y="4798368"/>
+            <a:ext cx="17183100" cy="687586"/>
+          </a:xfrm>
+          <a:prstGeom prst="rect">
+            <a:avLst/>
+          </a:prstGeom>
+          <a:noFill/>
+          <a:ln/>
+        </p:spPr>
+        <p:txBody>
+          <a:bodyPr wrap="square" lIns="25400" tIns="25400" rIns="25400" bIns="25400" rtlCol="0" anchor="t">
+            <a:normAutofit/>
+          </a:bodyPr>
+          <a:lstStyle/>
+          <a:p>
+            <a:pPr marL="0" indent="0" algn="l">
+              <a:lnSpc>
+                <a:spcPct val="136400"/>
+              </a:lnSpc>
+              <a:buNone/>
+            </a:pPr>
+            <a:r>
+              <a:rPr lang="en-US" sz="3300" dirty="0">
+                <a:solidFill>
+                  <a:srgbClr val="E9E9ED"/>
+                </a:solidFill>
+                <a:latin typeface="Arial" pitchFamily="34" charset="0"/>
+                <a:ea typeface="Arial" pitchFamily="34" charset="-122"/>
+                <a:cs typeface="Arial" pitchFamily="34" charset="-120"/>
+              </a:rPr>
+              <a:t>No understanding of the system</a:t>
+            </a:r>
+            <a:endParaRPr lang="en-US" sz="3300" dirty="0"/>
+          </a:p>
+        </p:txBody>
+      </p:sp>
+      <p:sp>
+        <p:nvSpPr>
+          <p:cNvPr id="5" name="Text 3">
+            <a:extLst>
+              <a:ext uri="{FF2B5EF4-FFF2-40B4-BE49-F238E27FC236}">
+                <a16:creationId xmlns:a16="http://schemas.microsoft.com/office/drawing/2014/main" id="{C6431405-0859-559C-3FF3-6748AF5EDBD5}"/>
+              </a:ext>
+            </a:extLst>
+          </p:cNvPr>
+          <p:cNvSpPr/>
+          <p:nvPr/>
+        </p:nvSpPr>
+        <p:spPr>
+          <a:xfrm>
+            <a:off x="1333500" y="5733604"/>
+            <a:ext cx="17183100" cy="687586"/>
+          </a:xfrm>
+          <a:prstGeom prst="rect">
+            <a:avLst/>
+          </a:prstGeom>
+          <a:noFill/>
+          <a:ln/>
+        </p:spPr>
+        <p:txBody>
+          <a:bodyPr wrap="square" lIns="25400" tIns="25400" rIns="25400" bIns="25400" rtlCol="0" anchor="t">
+            <a:normAutofit/>
+          </a:bodyPr>
+          <a:lstStyle/>
+          <a:p>
+            <a:pPr marL="0" indent="0" algn="l">
+              <a:lnSpc>
+                <a:spcPct val="136400"/>
+              </a:lnSpc>
+              <a:buNone/>
+            </a:pPr>
+            <a:r>
+              <a:rPr lang="en-US" sz="3300" dirty="0">
+                <a:solidFill>
+                  <a:srgbClr val="E9E9ED"/>
+                </a:solidFill>
+                <a:latin typeface="Arial" pitchFamily="34" charset="0"/>
+                <a:ea typeface="Arial" pitchFamily="34" charset="-122"/>
+                <a:cs typeface="Arial" pitchFamily="34" charset="-120"/>
+              </a:rPr>
+              <a:t>No tests to protect us in its absence</a:t>
+            </a:r>
+            <a:endParaRPr lang="en-US" sz="3300" dirty="0"/>
+          </a:p>
+        </p:txBody>
+      </p:sp>
+    </p:spTree>
+    <p:extLst>
+      <p:ext uri="{BB962C8B-B14F-4D97-AF65-F5344CB8AC3E}">
+        <p14:creationId xmlns:p14="http://schemas.microsoft.com/office/powerpoint/2010/main" val="1175969215"/>
+      </p:ext>
+    </p:extLst>
+  </p:cSld>
+  <p:clrMapOvr>
+    <a:masterClrMapping/>
+  </p:clrMapOvr>
+</p:sld>
+</file>
+
+<file path=ppt/slides/slide12.xml><?xml version="1.0" encoding="utf-8"?>
+<p:sld xmlns:a="http://schemas.openxmlformats.org/drawingml/2006/main" xmlns:r="http://schemas.openxmlformats.org/officeDocument/2006/relationships" xmlns:p="http://schemas.openxmlformats.org/presentationml/2006/main">
+  <p:cSld>
+    <p:bg>
+      <p:bgPr>
+        <a:solidFill>
+          <a:srgbClr val="161826"/>
+        </a:solidFill>
+        <a:effectLst/>
+      </p:bgPr>
+    </p:bg>
+    <p:spTree>
+      <p:nvGrpSpPr>
+        <p:cNvPr id="1" name="">
+          <a:extLst>
+            <a:ext uri="{FF2B5EF4-FFF2-40B4-BE49-F238E27FC236}">
+              <a16:creationId xmlns:a16="http://schemas.microsoft.com/office/drawing/2014/main" id="{E79450C2-6478-9ACD-7EA5-E7A2F9952E75}"/>
+            </a:ext>
+          </a:extLst>
+        </p:cNvPr>
+        <p:cNvGrpSpPr/>
+        <p:nvPr/>
+      </p:nvGrpSpPr>
+      <p:grpSpPr>
+        <a:xfrm>
+          <a:off x="0" y="0"/>
+          <a:ext cx="0" cy="0"/>
+          <a:chOff x="0" y="0"/>
+          <a:chExt cx="0" cy="0"/>
+        </a:xfrm>
+      </p:grpSpPr>
+      <p:sp>
+        <p:nvSpPr>
+          <p:cNvPr id="2" name="Shape 0">
+            <a:extLst>
+              <a:ext uri="{FF2B5EF4-FFF2-40B4-BE49-F238E27FC236}">
+                <a16:creationId xmlns:a16="http://schemas.microsoft.com/office/drawing/2014/main" id="{A613CE37-56EB-9823-7047-A09BE5C53656}"/>
+              </a:ext>
+            </a:extLst>
+          </p:cNvPr>
+          <p:cNvSpPr/>
+          <p:nvPr/>
+        </p:nvSpPr>
+        <p:spPr>
+          <a:xfrm>
+            <a:off x="1333500" y="3159026"/>
+            <a:ext cx="533400" cy="28575"/>
+          </a:xfrm>
+          <a:prstGeom prst="rect">
+            <a:avLst/>
+          </a:prstGeom>
+          <a:solidFill>
+            <a:srgbClr val="9184D9"/>
+          </a:solidFill>
+          <a:ln/>
+        </p:spPr>
+        <p:txBody>
+          <a:bodyPr/>
+          <a:lstStyle/>
+          <a:p>
+            <a:endParaRPr lang="en-US"/>
+          </a:p>
+        </p:txBody>
+      </p:sp>
+      <p:sp>
+        <p:nvSpPr>
+          <p:cNvPr id="3" name="Text 1">
+            <a:extLst>
+              <a:ext uri="{FF2B5EF4-FFF2-40B4-BE49-F238E27FC236}">
+                <a16:creationId xmlns:a16="http://schemas.microsoft.com/office/drawing/2014/main" id="{D6BCC140-4036-C2C3-047E-5D53488AE6E2}"/>
+              </a:ext>
+            </a:extLst>
+          </p:cNvPr>
+          <p:cNvSpPr/>
+          <p:nvPr/>
+        </p:nvSpPr>
+        <p:spPr>
+          <a:xfrm>
+            <a:off x="1333500" y="3606701"/>
+            <a:ext cx="17183100" cy="696367"/>
+          </a:xfrm>
+          <a:prstGeom prst="rect">
+            <a:avLst/>
+          </a:prstGeom>
+          <a:noFill/>
+          <a:ln/>
+        </p:spPr>
+        <p:txBody>
+          <a:bodyPr wrap="square" lIns="25400" tIns="25400" rIns="25400" bIns="25400" rtlCol="0" anchor="t">
+            <a:normAutofit lnSpcReduction="10000"/>
+          </a:bodyPr>
+          <a:lstStyle/>
+          <a:p>
+            <a:pPr marL="0" indent="0" algn="l">
+              <a:lnSpc>
+                <a:spcPct val="93405"/>
+              </a:lnSpc>
+              <a:buNone/>
+            </a:pPr>
+            <a:r>
+              <a:rPr lang="en-US" sz="4800" kern="0" spc="-96" dirty="0">
+                <a:solidFill>
+                  <a:srgbClr val="E9E9ED"/>
+                </a:solidFill>
+                <a:latin typeface="Arial" pitchFamily="34" charset="0"/>
+                <a:ea typeface="Arial" pitchFamily="34" charset="-122"/>
+                <a:cs typeface="Arial" pitchFamily="34" charset="-120"/>
+              </a:rPr>
+              <a:t>Why legacy resists change</a:t>
+            </a:r>
+            <a:endParaRPr lang="en-US" sz="4800" dirty="0"/>
+          </a:p>
+        </p:txBody>
+      </p:sp>
+      <p:sp>
+        <p:nvSpPr>
+          <p:cNvPr id="4" name="Text 2">
+            <a:extLst>
+              <a:ext uri="{FF2B5EF4-FFF2-40B4-BE49-F238E27FC236}">
+                <a16:creationId xmlns:a16="http://schemas.microsoft.com/office/drawing/2014/main" id="{E5E24E5B-9040-BFDD-606B-FAADAC925428}"/>
+              </a:ext>
+            </a:extLst>
+          </p:cNvPr>
+          <p:cNvSpPr/>
+          <p:nvPr/>
+        </p:nvSpPr>
+        <p:spPr>
+          <a:xfrm>
+            <a:off x="1333500" y="4798368"/>
+            <a:ext cx="17183100" cy="687586"/>
+          </a:xfrm>
+          <a:prstGeom prst="rect">
+            <a:avLst/>
+          </a:prstGeom>
+          <a:noFill/>
+          <a:ln/>
+        </p:spPr>
+        <p:txBody>
+          <a:bodyPr wrap="square" lIns="25400" tIns="25400" rIns="25400" bIns="25400" rtlCol="0" anchor="t">
+            <a:normAutofit/>
+          </a:bodyPr>
+          <a:lstStyle/>
+          <a:p>
+            <a:pPr marL="0" indent="0" algn="l">
+              <a:lnSpc>
+                <a:spcPct val="136400"/>
+              </a:lnSpc>
+              <a:buNone/>
+            </a:pPr>
+            <a:r>
+              <a:rPr lang="en-US" sz="3300" dirty="0">
+                <a:solidFill>
+                  <a:srgbClr val="E9E9ED"/>
+                </a:solidFill>
+                <a:latin typeface="Arial" pitchFamily="34" charset="0"/>
+                <a:ea typeface="Arial" pitchFamily="34" charset="-122"/>
+                <a:cs typeface="Arial" pitchFamily="34" charset="-120"/>
+              </a:rPr>
+              <a:t>No understanding of the system</a:t>
+            </a:r>
+            <a:endParaRPr lang="en-US" sz="3300" dirty="0"/>
+          </a:p>
+        </p:txBody>
+      </p:sp>
+      <p:sp>
+        <p:nvSpPr>
+          <p:cNvPr id="5" name="Text 3">
+            <a:extLst>
+              <a:ext uri="{FF2B5EF4-FFF2-40B4-BE49-F238E27FC236}">
+                <a16:creationId xmlns:a16="http://schemas.microsoft.com/office/drawing/2014/main" id="{C5FFEA53-AFAB-812C-A168-0E555C9779FF}"/>
+              </a:ext>
+            </a:extLst>
+          </p:cNvPr>
+          <p:cNvSpPr/>
+          <p:nvPr/>
+        </p:nvSpPr>
+        <p:spPr>
+          <a:xfrm>
+            <a:off x="1333500" y="5733604"/>
+            <a:ext cx="17183100" cy="687586"/>
+          </a:xfrm>
+          <a:prstGeom prst="rect">
+            <a:avLst/>
+          </a:prstGeom>
+          <a:noFill/>
+          <a:ln/>
+        </p:spPr>
+        <p:txBody>
+          <a:bodyPr wrap="square" lIns="25400" tIns="25400" rIns="25400" bIns="25400" rtlCol="0" anchor="t">
+            <a:normAutofit/>
+          </a:bodyPr>
+          <a:lstStyle/>
+          <a:p>
+            <a:pPr marL="0" indent="0" algn="l">
+              <a:lnSpc>
+                <a:spcPct val="136400"/>
+              </a:lnSpc>
+              <a:buNone/>
+            </a:pPr>
+            <a:r>
+              <a:rPr lang="en-US" sz="3300" dirty="0">
+                <a:solidFill>
+                  <a:srgbClr val="E9E9ED"/>
+                </a:solidFill>
+                <a:latin typeface="Arial" pitchFamily="34" charset="0"/>
+                <a:ea typeface="Arial" pitchFamily="34" charset="-122"/>
+                <a:cs typeface="Arial" pitchFamily="34" charset="-120"/>
+              </a:rPr>
+              <a:t>No tests to protect us in its absence</a:t>
+            </a:r>
+            <a:endParaRPr lang="en-US" sz="3300" dirty="0"/>
+          </a:p>
+        </p:txBody>
+      </p:sp>
+      <p:sp>
+        <p:nvSpPr>
+          <p:cNvPr id="6" name="Text 4">
+            <a:extLst>
+              <a:ext uri="{FF2B5EF4-FFF2-40B4-BE49-F238E27FC236}">
+                <a16:creationId xmlns:a16="http://schemas.microsoft.com/office/drawing/2014/main" id="{02F021CD-2F50-63AF-235D-4053E040D13A}"/>
+              </a:ext>
+            </a:extLst>
+          </p:cNvPr>
+          <p:cNvSpPr/>
+          <p:nvPr/>
+        </p:nvSpPr>
+        <p:spPr>
+          <a:xfrm>
+            <a:off x="1333500" y="6668839"/>
+            <a:ext cx="17183100" cy="687586"/>
+          </a:xfrm>
+          <a:prstGeom prst="rect">
+            <a:avLst/>
+          </a:prstGeom>
+          <a:noFill/>
+          <a:ln/>
+        </p:spPr>
+        <p:txBody>
+          <a:bodyPr wrap="square" lIns="25400" tIns="25400" rIns="25400" bIns="25400" rtlCol="0" anchor="t">
+            <a:normAutofit/>
+          </a:bodyPr>
+          <a:lstStyle/>
+          <a:p>
+            <a:pPr marL="0" indent="0" algn="l">
+              <a:lnSpc>
+                <a:spcPct val="136400"/>
+              </a:lnSpc>
+              <a:buNone/>
+            </a:pPr>
+            <a:r>
+              <a:rPr lang="en-US" sz="3300" dirty="0">
+                <a:solidFill>
+                  <a:srgbClr val="E9E9ED"/>
+                </a:solidFill>
+                <a:latin typeface="Arial" pitchFamily="34" charset="0"/>
+                <a:ea typeface="Arial" pitchFamily="34" charset="-122"/>
+                <a:cs typeface="Arial" pitchFamily="34" charset="-120"/>
+              </a:rPr>
+              <a:t>Real business cost when we get it wrong</a:t>
+            </a:r>
+            <a:endParaRPr lang="en-US" sz="3300" dirty="0"/>
+          </a:p>
+        </p:txBody>
+      </p:sp>
+    </p:spTree>
+    <p:extLst>
+      <p:ext uri="{BB962C8B-B14F-4D97-AF65-F5344CB8AC3E}">
+        <p14:creationId xmlns:p14="http://schemas.microsoft.com/office/powerpoint/2010/main" val="3805788497"/>
+      </p:ext>
+    </p:extLst>
+  </p:cSld>
+  <p:clrMapOvr>
+    <a:masterClrMapping/>
+  </p:clrMapOvr>
+</p:sld>
+</file>
+
+<file path=ppt/slides/slide13.xml><?xml version="1.0" encoding="utf-8"?>
 <p:sld xmlns:a="http://schemas.openxmlformats.org/drawingml/2006/main" xmlns:r="http://schemas.openxmlformats.org/officeDocument/2006/relationships" xmlns:p="http://schemas.openxmlformats.org/presentationml/2006/main">
   <p:cSld name="Slide 12">
     <p:bg>
@@ -4517,7 +4893,7 @@
 </p:sld>
 </file>
 
-<file path=ppt/slides/slide12.xml><?xml version="1.0" encoding="utf-8"?>
+<file path=ppt/slides/slide14.xml><?xml version="1.0" encoding="utf-8"?>
 <p:sld xmlns:a="http://schemas.openxmlformats.org/drawingml/2006/main" xmlns:r="http://schemas.openxmlformats.org/officeDocument/2006/relationships" xmlns:p="http://schemas.openxmlformats.org/presentationml/2006/main">
   <p:cSld>
     <p:bg>
@@ -4761,351 +5137,7 @@
 </p:sld>
 </file>
 
-<file path=ppt/slides/slide13.xml><?xml version="1.0" encoding="utf-8"?>
-<p:sld xmlns:a="http://schemas.openxmlformats.org/drawingml/2006/main" xmlns:r="http://schemas.openxmlformats.org/officeDocument/2006/relationships" xmlns:p="http://schemas.openxmlformats.org/presentationml/2006/main">
-  <p:cSld>
-    <p:bg>
-      <p:bgPr>
-        <a:solidFill>
-          <a:srgbClr val="161826"/>
-        </a:solidFill>
-        <a:effectLst/>
-      </p:bgPr>
-    </p:bg>
-    <p:spTree>
-      <p:nvGrpSpPr>
-        <p:cNvPr id="1" name="">
-          <a:extLst>
-            <a:ext uri="{FF2B5EF4-FFF2-40B4-BE49-F238E27FC236}">
-              <a16:creationId xmlns:a16="http://schemas.microsoft.com/office/drawing/2014/main" id="{7DDD646D-6EE7-B728-9B0F-A9D4D5D78ED4}"/>
-            </a:ext>
-          </a:extLst>
-        </p:cNvPr>
-        <p:cNvGrpSpPr/>
-        <p:nvPr/>
-      </p:nvGrpSpPr>
-      <p:grpSpPr>
-        <a:xfrm>
-          <a:off x="0" y="0"/>
-          <a:ext cx="0" cy="0"/>
-          <a:chOff x="0" y="0"/>
-          <a:chExt cx="0" cy="0"/>
-        </a:xfrm>
-      </p:grpSpPr>
-      <p:sp>
-        <p:nvSpPr>
-          <p:cNvPr id="2" name="Text 0">
-            <a:extLst>
-              <a:ext uri="{FF2B5EF4-FFF2-40B4-BE49-F238E27FC236}">
-                <a16:creationId xmlns:a16="http://schemas.microsoft.com/office/drawing/2014/main" id="{7CB24D5A-AA1C-5585-C798-E4B908B6907E}"/>
-              </a:ext>
-            </a:extLst>
-          </p:cNvPr>
-          <p:cNvSpPr/>
-          <p:nvPr/>
-        </p:nvSpPr>
-        <p:spPr>
-          <a:xfrm>
-            <a:off x="1333500" y="3092053"/>
-            <a:ext cx="2409825" cy="609600"/>
-          </a:xfrm>
-          <a:prstGeom prst="rect">
-            <a:avLst/>
-          </a:prstGeom>
-          <a:noFill/>
-          <a:ln/>
-        </p:spPr>
-        <p:txBody>
-          <a:bodyPr wrap="square" lIns="25400" tIns="25400" rIns="25400" bIns="25400" rtlCol="0" anchor="t">
-            <a:normAutofit lnSpcReduction="10000"/>
-          </a:bodyPr>
-          <a:lstStyle/>
-          <a:p>
-            <a:pPr marL="0" indent="0" algn="l">
-              <a:lnSpc>
-                <a:spcPct val="86957"/>
-              </a:lnSpc>
-              <a:buNone/>
-            </a:pPr>
-            <a:r>
-              <a:rPr lang="en-US" sz="4500" kern="0" spc="-90" dirty="0">
-                <a:solidFill>
-                  <a:srgbClr val="9184D9"/>
-                </a:solidFill>
-                <a:latin typeface="Arial" pitchFamily="34" charset="0"/>
-                <a:ea typeface="Arial" pitchFamily="34" charset="-122"/>
-                <a:cs typeface="Arial" pitchFamily="34" charset="-120"/>
-              </a:rPr>
-              <a:t>2004</a:t>
-            </a:r>
-            <a:endParaRPr lang="en-US" sz="4500" dirty="0"/>
-          </a:p>
-        </p:txBody>
-      </p:sp>
-      <p:sp>
-        <p:nvSpPr>
-          <p:cNvPr id="3" name="Text 1">
-            <a:extLst>
-              <a:ext uri="{FF2B5EF4-FFF2-40B4-BE49-F238E27FC236}">
-                <a16:creationId xmlns:a16="http://schemas.microsoft.com/office/drawing/2014/main" id="{A2C9C251-5370-78D6-6519-205EB8E37BC5}"/>
-              </a:ext>
-            </a:extLst>
-          </p:cNvPr>
-          <p:cNvSpPr/>
-          <p:nvPr/>
-        </p:nvSpPr>
-        <p:spPr>
-          <a:xfrm>
-            <a:off x="4057650" y="3187303"/>
-            <a:ext cx="14186535" cy="550069"/>
-          </a:xfrm>
-          <a:prstGeom prst="rect">
-            <a:avLst/>
-          </a:prstGeom>
-          <a:noFill/>
-          <a:ln/>
-        </p:spPr>
-        <p:txBody>
-          <a:bodyPr wrap="square" lIns="25400" tIns="25400" rIns="25400" bIns="25400" rtlCol="0" anchor="t">
-            <a:normAutofit lnSpcReduction="10000"/>
-          </a:bodyPr>
-          <a:lstStyle/>
-          <a:p>
-            <a:pPr marL="0" indent="0" algn="l">
-              <a:lnSpc>
-                <a:spcPct val="112000"/>
-              </a:lnSpc>
-              <a:buNone/>
-            </a:pPr>
-            <a:r>
-              <a:rPr lang="en-US" sz="3150" kern="0" spc="-47" dirty="0">
-                <a:solidFill>
-                  <a:srgbClr val="E9E9ED"/>
-                </a:solidFill>
-                <a:latin typeface="Arial" pitchFamily="34" charset="0"/>
-                <a:ea typeface="Arial" pitchFamily="34" charset="-122"/>
-                <a:cs typeface="Arial" pitchFamily="34" charset="-120"/>
-              </a:rPr>
-              <a:t>“to me, legacy code is simply code without tests”</a:t>
-            </a:r>
-            <a:endParaRPr lang="en-US" sz="3150" dirty="0"/>
-          </a:p>
-        </p:txBody>
-      </p:sp>
-      <p:sp>
-        <p:nvSpPr>
-          <p:cNvPr id="4" name="Text 2">
-            <a:extLst>
-              <a:ext uri="{FF2B5EF4-FFF2-40B4-BE49-F238E27FC236}">
-                <a16:creationId xmlns:a16="http://schemas.microsoft.com/office/drawing/2014/main" id="{97A2C548-B4B6-214F-9BC1-9795EA393AF2}"/>
-              </a:ext>
-            </a:extLst>
-          </p:cNvPr>
-          <p:cNvSpPr/>
-          <p:nvPr/>
-        </p:nvSpPr>
-        <p:spPr>
-          <a:xfrm>
-            <a:off x="1333500" y="4423172"/>
-            <a:ext cx="2409825" cy="609600"/>
-          </a:xfrm>
-          <a:prstGeom prst="rect">
-            <a:avLst/>
-          </a:prstGeom>
-          <a:noFill/>
-          <a:ln/>
-        </p:spPr>
-        <p:txBody>
-          <a:bodyPr wrap="square" lIns="25400" tIns="25400" rIns="25400" bIns="25400" rtlCol="0" anchor="t">
-            <a:normAutofit lnSpcReduction="10000"/>
-          </a:bodyPr>
-          <a:lstStyle/>
-          <a:p>
-            <a:pPr marL="0" indent="0" algn="l">
-              <a:lnSpc>
-                <a:spcPct val="86957"/>
-              </a:lnSpc>
-              <a:buNone/>
-            </a:pPr>
-            <a:r>
-              <a:rPr lang="en-US" sz="4500" kern="0" spc="-90" dirty="0">
-                <a:solidFill>
-                  <a:srgbClr val="9184D9"/>
-                </a:solidFill>
-                <a:latin typeface="Arial" pitchFamily="34" charset="0"/>
-                <a:ea typeface="Arial" pitchFamily="34" charset="-122"/>
-                <a:cs typeface="Arial" pitchFamily="34" charset="-120"/>
-              </a:rPr>
-              <a:t>2018</a:t>
-            </a:r>
-            <a:endParaRPr lang="en-US" sz="4500" dirty="0"/>
-          </a:p>
-        </p:txBody>
-      </p:sp>
-      <p:sp>
-        <p:nvSpPr>
-          <p:cNvPr id="5" name="Text 3">
-            <a:extLst>
-              <a:ext uri="{FF2B5EF4-FFF2-40B4-BE49-F238E27FC236}">
-                <a16:creationId xmlns:a16="http://schemas.microsoft.com/office/drawing/2014/main" id="{623D32EC-6E80-D384-FCE4-CD2F3545E4A1}"/>
-              </a:ext>
-            </a:extLst>
-          </p:cNvPr>
-          <p:cNvSpPr/>
-          <p:nvPr/>
-        </p:nvSpPr>
-        <p:spPr>
-          <a:xfrm>
-            <a:off x="4057650" y="4518422"/>
-            <a:ext cx="13283756" cy="1062038"/>
-          </a:xfrm>
-          <a:prstGeom prst="rect">
-            <a:avLst/>
-          </a:prstGeom>
-          <a:noFill/>
-          <a:ln/>
-        </p:spPr>
-        <p:txBody>
-          <a:bodyPr wrap="square" lIns="25400" tIns="25400" rIns="25400" bIns="25400" rtlCol="0" anchor="t">
-            <a:normAutofit lnSpcReduction="10000"/>
-          </a:bodyPr>
-          <a:lstStyle/>
-          <a:p>
-            <a:pPr marL="0" indent="0" algn="l">
-              <a:lnSpc>
-                <a:spcPct val="112000"/>
-              </a:lnSpc>
-              <a:buNone/>
-            </a:pPr>
-            <a:r>
-              <a:rPr lang="en-US" sz="3150" kern="0" spc="-47" dirty="0">
-                <a:solidFill>
-                  <a:srgbClr val="E9E9ED"/>
-                </a:solidFill>
-                <a:latin typeface="Arial" pitchFamily="34" charset="0"/>
-                <a:ea typeface="Arial" pitchFamily="34" charset="-122"/>
-                <a:cs typeface="Arial" pitchFamily="34" charset="-120"/>
-              </a:rPr>
-              <a:t>“…the greatest limitation in writing software is our ability to understand the systems we are creating.”</a:t>
-            </a:r>
-            <a:endParaRPr lang="en-US" sz="3150" dirty="0"/>
-          </a:p>
-        </p:txBody>
-      </p:sp>
-      <p:sp>
-        <p:nvSpPr>
-          <p:cNvPr id="6" name="Text 4">
-            <a:extLst>
-              <a:ext uri="{FF2B5EF4-FFF2-40B4-BE49-F238E27FC236}">
-                <a16:creationId xmlns:a16="http://schemas.microsoft.com/office/drawing/2014/main" id="{88F243BF-1063-09CF-57FE-D19DE48B987B}"/>
-              </a:ext>
-            </a:extLst>
-          </p:cNvPr>
-          <p:cNvSpPr/>
-          <p:nvPr/>
-        </p:nvSpPr>
-        <p:spPr>
-          <a:xfrm>
-            <a:off x="1333500" y="6266259"/>
-            <a:ext cx="2409825" cy="609600"/>
-          </a:xfrm>
-          <a:prstGeom prst="rect">
-            <a:avLst/>
-          </a:prstGeom>
-          <a:noFill/>
-          <a:ln/>
-        </p:spPr>
-        <p:txBody>
-          <a:bodyPr wrap="square" lIns="25400" tIns="25400" rIns="25400" bIns="25400" rtlCol="0" anchor="t">
-            <a:normAutofit lnSpcReduction="10000"/>
-          </a:bodyPr>
-          <a:lstStyle/>
-          <a:p>
-            <a:pPr marL="0" indent="0" algn="l">
-              <a:lnSpc>
-                <a:spcPct val="86957"/>
-              </a:lnSpc>
-              <a:buNone/>
-            </a:pPr>
-            <a:r>
-              <a:rPr lang="en-US" sz="4500" kern="0" spc="-90" dirty="0">
-                <a:solidFill>
-                  <a:srgbClr val="9184D9"/>
-                </a:solidFill>
-                <a:latin typeface="Arial" pitchFamily="34" charset="0"/>
-                <a:ea typeface="Arial" pitchFamily="34" charset="-122"/>
-                <a:cs typeface="Arial" pitchFamily="34" charset="-120"/>
-              </a:rPr>
-              <a:t>2022</a:t>
-            </a:r>
-            <a:endParaRPr lang="en-US" sz="4500" dirty="0"/>
-          </a:p>
-        </p:txBody>
-      </p:sp>
-      <p:sp>
-        <p:nvSpPr>
-          <p:cNvPr id="7" name="Text 5">
-            <a:extLst>
-              <a:ext uri="{FF2B5EF4-FFF2-40B4-BE49-F238E27FC236}">
-                <a16:creationId xmlns:a16="http://schemas.microsoft.com/office/drawing/2014/main" id="{5B43F1D9-19E5-ACD6-128A-D226707A5130}"/>
-              </a:ext>
-            </a:extLst>
-          </p:cNvPr>
-          <p:cNvSpPr/>
-          <p:nvPr/>
-        </p:nvSpPr>
-        <p:spPr>
-          <a:xfrm>
-            <a:off x="4057650" y="6361509"/>
-            <a:ext cx="13283756" cy="1062038"/>
-          </a:xfrm>
-          <a:prstGeom prst="rect">
-            <a:avLst/>
-          </a:prstGeom>
-          <a:noFill/>
-          <a:ln/>
-        </p:spPr>
-        <p:txBody>
-          <a:bodyPr wrap="square" lIns="25400" tIns="25400" rIns="25400" bIns="25400" rtlCol="0" anchor="t">
-            <a:normAutofit/>
-          </a:bodyPr>
-          <a:lstStyle/>
-          <a:p>
-            <a:pPr marL="0" indent="0" algn="l">
-              <a:lnSpc>
-                <a:spcPct val="112000"/>
-              </a:lnSpc>
-              <a:buNone/>
-            </a:pPr>
-            <a:r>
-              <a:rPr lang="en-US" sz="3150" kern="0" spc="-47" dirty="0">
-                <a:solidFill>
-                  <a:srgbClr val="E9E9ED"/>
-                </a:solidFill>
-                <a:latin typeface="Arial" pitchFamily="34" charset="0"/>
-                <a:ea typeface="Arial" pitchFamily="34" charset="-122"/>
-                <a:cs typeface="Arial" pitchFamily="34" charset="-120"/>
-              </a:rPr>
-              <a:t>“Legacy code is code that delivers more in value than it costs to maintain.”</a:t>
-            </a:r>
-            <a:endParaRPr lang="en-US" sz="3150" dirty="0"/>
-          </a:p>
-        </p:txBody>
-      </p:sp>
-    </p:spTree>
-    <p:extLst>
-      <p:ext uri="{BB962C8B-B14F-4D97-AF65-F5344CB8AC3E}">
-        <p14:creationId xmlns:p14="http://schemas.microsoft.com/office/powerpoint/2010/main" val="2902783270"/>
-      </p:ext>
-    </p:extLst>
-  </p:cSld>
-  <p:clrMapOvr>
-    <a:masterClrMapping/>
-  </p:clrMapOvr>
-</p:sld>
-</file>
-
-<file path=ppt/slides/slide14.xml><?xml version="1.0" encoding="utf-8"?>
+<file path=ppt/slides/slide15.xml><?xml version="1.0" encoding="utf-8"?>
 <p:sld xmlns:a="http://schemas.openxmlformats.org/drawingml/2006/main" xmlns:r="http://schemas.openxmlformats.org/officeDocument/2006/relationships" xmlns:p="http://schemas.openxmlformats.org/presentationml/2006/main">
   <p:cSld>
     <p:bg>
@@ -5449,7 +5481,7 @@
 </p:sld>
 </file>
 
-<file path=ppt/slides/slide15.xml><?xml version="1.0" encoding="utf-8"?>
+<file path=ppt/slides/slide16.xml><?xml version="1.0" encoding="utf-8"?>
 <p:sld xmlns:a="http://schemas.openxmlformats.org/drawingml/2006/main" xmlns:r="http://schemas.openxmlformats.org/officeDocument/2006/relationships" xmlns:p="http://schemas.openxmlformats.org/presentationml/2006/main">
   <p:cSld name="Slide 13">
     <p:bg>
@@ -5570,7 +5602,7 @@
 </p:sld>
 </file>
 
-<file path=ppt/slides/slide16.xml><?xml version="1.0" encoding="utf-8"?>
+<file path=ppt/slides/slide17.xml><?xml version="1.0" encoding="utf-8"?>
 <p:sld xmlns:a="http://schemas.openxmlformats.org/drawingml/2006/main" xmlns:r="http://schemas.openxmlformats.org/officeDocument/2006/relationships" xmlns:p="http://schemas.openxmlformats.org/presentationml/2006/main">
   <p:cSld name="Slide 14">
     <p:bg>
@@ -5647,7 +5679,7 @@
 </p:sld>
 </file>
 
-<file path=ppt/slides/slide17.xml><?xml version="1.0" encoding="utf-8"?>
+<file path=ppt/slides/slide18.xml><?xml version="1.0" encoding="utf-8"?>
 <p:sld xmlns:a="http://schemas.openxmlformats.org/drawingml/2006/main" xmlns:r="http://schemas.openxmlformats.org/officeDocument/2006/relationships" xmlns:p="http://schemas.openxmlformats.org/presentationml/2006/main">
   <p:cSld name="Slide 15">
     <p:bg>
@@ -5768,7 +5800,7 @@
 </p:sld>
 </file>
 
-<file path=ppt/slides/slide18.xml><?xml version="1.0" encoding="utf-8"?>
+<file path=ppt/slides/slide19.xml><?xml version="1.0" encoding="utf-8"?>
 <p:sld xmlns:a="http://schemas.openxmlformats.org/drawingml/2006/main" xmlns:r="http://schemas.openxmlformats.org/officeDocument/2006/relationships" xmlns:p="http://schemas.openxmlformats.org/presentationml/2006/main">
   <p:cSld name="Slide 16">
     <p:bg>
@@ -5922,83 +5954,6 @@
               <a:t>Interfaces. Data. Constraints. Engineering decisions.</a:t>
             </a:r>
             <a:endParaRPr lang="en-US" sz="3300" dirty="0"/>
-          </a:p>
-        </p:txBody>
-      </p:sp>
-    </p:spTree>
-  </p:cSld>
-  <p:clrMapOvr>
-    <a:masterClrMapping/>
-  </p:clrMapOvr>
-</p:sld>
-</file>
-
-<file path=ppt/slides/slide19.xml><?xml version="1.0" encoding="utf-8"?>
-<p:sld xmlns:a="http://schemas.openxmlformats.org/drawingml/2006/main" xmlns:r="http://schemas.openxmlformats.org/officeDocument/2006/relationships" xmlns:p="http://schemas.openxmlformats.org/presentationml/2006/main">
-  <p:cSld name="Slide 17">
-    <p:bg>
-      <p:bgPr>
-        <a:solidFill>
-          <a:srgbClr val="161826"/>
-        </a:solidFill>
-        <a:effectLst/>
-      </p:bgPr>
-    </p:bg>
-    <p:spTree>
-      <p:nvGrpSpPr>
-        <p:cNvPr id="1" name=""/>
-        <p:cNvGrpSpPr/>
-        <p:nvPr/>
-      </p:nvGrpSpPr>
-      <p:grpSpPr>
-        <a:xfrm>
-          <a:off x="0" y="0"/>
-          <a:ext cx="0" cy="0"/>
-          <a:chOff x="0" y="0"/>
-          <a:chExt cx="0" cy="0"/>
-        </a:xfrm>
-      </p:grpSpPr>
-      <p:sp>
-        <p:nvSpPr>
-          <p:cNvPr id="2" name="Text 0"/>
-          <p:cNvSpPr/>
-          <p:nvPr/>
-        </p:nvSpPr>
-        <p:spPr>
-          <a:xfrm>
-            <a:off x="1333500" y="3360837"/>
-            <a:ext cx="15500985" cy="3793927"/>
-          </a:xfrm>
-          <a:prstGeom prst="rect">
-            <a:avLst/>
-          </a:prstGeom>
-          <a:noFill/>
-          <a:ln/>
-        </p:spPr>
-        <p:txBody>
-          <a:bodyPr wrap="square" lIns="25400" tIns="25400" rIns="25400" bIns="25400" rtlCol="0" anchor="t">
-            <a:normAutofit lnSpcReduction="10000"/>
-          </a:bodyPr>
-          <a:lstStyle/>
-          <a:p>
-            <a:pPr marL="0" indent="0" algn="l">
-              <a:lnSpc>
-                <a:spcPct val="92563"/>
-              </a:lnSpc>
-              <a:buNone/>
-            </a:pPr>
-            <a:r>
-              <a:rPr lang="en-US" sz="9300" kern="0" spc="-279" dirty="0">
-                <a:solidFill>
-                  <a:srgbClr val="E9E9ED"/>
-                </a:solidFill>
-                <a:latin typeface="Arial" pitchFamily="34" charset="0"/>
-                <a:ea typeface="Arial" pitchFamily="34" charset="-122"/>
-                <a:cs typeface="Arial" pitchFamily="34" charset="-120"/>
-              </a:rPr>
-              <a:t>The definition of what should be true collapses to a subset of what is.</a:t>
-            </a:r>
-            <a:endParaRPr lang="en-US" sz="9300" dirty="0"/>
           </a:p>
         </p:txBody>
       </p:sp>
@@ -6133,6 +6088,127 @@
 
 <file path=ppt/slides/slide20.xml><?xml version="1.0" encoding="utf-8"?>
 <p:sld xmlns:a="http://schemas.openxmlformats.org/drawingml/2006/main" xmlns:r="http://schemas.openxmlformats.org/officeDocument/2006/relationships" xmlns:p="http://schemas.openxmlformats.org/presentationml/2006/main">
+  <p:cSld name="Slide 17">
+    <p:bg>
+      <p:bgPr>
+        <a:solidFill>
+          <a:srgbClr val="161826"/>
+        </a:solidFill>
+        <a:effectLst/>
+      </p:bgPr>
+    </p:bg>
+    <p:spTree>
+      <p:nvGrpSpPr>
+        <p:cNvPr id="1" name=""/>
+        <p:cNvGrpSpPr/>
+        <p:nvPr/>
+      </p:nvGrpSpPr>
+      <p:grpSpPr>
+        <a:xfrm>
+          <a:off x="0" y="0"/>
+          <a:ext cx="0" cy="0"/>
+          <a:chOff x="0" y="0"/>
+          <a:chExt cx="0" cy="0"/>
+        </a:xfrm>
+      </p:grpSpPr>
+      <p:sp>
+        <p:nvSpPr>
+          <p:cNvPr id="2" name="Text 0"/>
+          <p:cNvSpPr/>
+          <p:nvPr/>
+        </p:nvSpPr>
+        <p:spPr>
+          <a:xfrm>
+            <a:off x="1333500" y="3360837"/>
+            <a:ext cx="15500985" cy="3793927"/>
+          </a:xfrm>
+          <a:prstGeom prst="rect">
+            <a:avLst/>
+          </a:prstGeom>
+          <a:noFill/>
+          <a:ln/>
+        </p:spPr>
+        <p:txBody>
+          <a:bodyPr wrap="square" lIns="25400" tIns="25400" rIns="25400" bIns="25400" rtlCol="0" anchor="t">
+            <a:normAutofit lnSpcReduction="10000"/>
+          </a:bodyPr>
+          <a:lstStyle/>
+          <a:p>
+            <a:pPr marL="0" indent="0" algn="l">
+              <a:lnSpc>
+                <a:spcPct val="92563"/>
+              </a:lnSpc>
+              <a:buNone/>
+            </a:pPr>
+            <a:r>
+              <a:rPr lang="en-US" sz="9300" kern="0" spc="-279" dirty="0">
+                <a:solidFill>
+                  <a:srgbClr val="E9E9ED"/>
+                </a:solidFill>
+                <a:latin typeface="Arial" pitchFamily="34" charset="0"/>
+                <a:ea typeface="Arial" pitchFamily="34" charset="-122"/>
+                <a:cs typeface="Arial" pitchFamily="34" charset="-120"/>
+              </a:rPr>
+              <a:t>The definition of what </a:t>
+            </a:r>
+            <a:r>
+              <a:rPr lang="en-US" sz="9300" i="1" u="sng" kern="0" spc="-279" dirty="0">
+                <a:solidFill>
+                  <a:srgbClr val="E9E9ED"/>
+                </a:solidFill>
+                <a:latin typeface="Arial" pitchFamily="34" charset="0"/>
+                <a:ea typeface="Arial" pitchFamily="34" charset="-122"/>
+                <a:cs typeface="Arial" pitchFamily="34" charset="-120"/>
+              </a:rPr>
+              <a:t>should be</a:t>
+            </a:r>
+            <a:r>
+              <a:rPr lang="en-US" sz="9300" kern="0" spc="-279" dirty="0">
+                <a:solidFill>
+                  <a:srgbClr val="E9E9ED"/>
+                </a:solidFill>
+                <a:latin typeface="Arial" pitchFamily="34" charset="0"/>
+                <a:ea typeface="Arial" pitchFamily="34" charset="-122"/>
+                <a:cs typeface="Arial" pitchFamily="34" charset="-120"/>
+              </a:rPr>
+              <a:t> collapses to a subset of what </a:t>
+            </a:r>
+            <a:r>
+              <a:rPr lang="en-US" sz="9300" i="1" u="sng" kern="0" spc="-279" dirty="0">
+                <a:solidFill>
+                  <a:srgbClr val="E9E9ED"/>
+                </a:solidFill>
+                <a:latin typeface="Arial" pitchFamily="34" charset="0"/>
+                <a:ea typeface="Arial" pitchFamily="34" charset="-122"/>
+                <a:cs typeface="Arial" pitchFamily="34" charset="-120"/>
+              </a:rPr>
+              <a:t>is</a:t>
+            </a:r>
+            <a:r>
+              <a:rPr lang="en-US" sz="9300" kern="0" spc="-279" dirty="0">
+                <a:solidFill>
+                  <a:srgbClr val="E9E9ED"/>
+                </a:solidFill>
+                <a:latin typeface="Arial" pitchFamily="34" charset="0"/>
+                <a:ea typeface="Arial" pitchFamily="34" charset="-122"/>
+                <a:cs typeface="Arial" pitchFamily="34" charset="-120"/>
+              </a:rPr>
+              <a:t>.</a:t>
+            </a:r>
+            <a:endParaRPr lang="en-US" sz="9300" dirty="0"/>
+          </a:p>
+        </p:txBody>
+      </p:sp>
+    </p:spTree>
+  </p:cSld>
+  <p:clrMapOvr>
+    <a:masterClrMapping/>
+  </p:clrMapOvr>
+</p:sld>
+</file>
+
+<file path=ppt/slides/slide21.xml><?xml version="1.0" encoding="utf-8"?>
+<p:sld xmlns:a="http://schemas.openxmlformats.org/drawingml/2006/main" xmlns:r="http://schemas.openxmlformats.org/officeDocument/2006/relationships" xmlns:p="http://schemas.openxmlformats.org/presentationml/2006/main">
   <p:cSld name="Slide 18">
     <p:bg>
       <p:bgPr>
@@ -6208,337 +6284,7 @@
 </p:sld>
 </file>
 
-<file path=ppt/slides/slide21.xml><?xml version="1.0" encoding="utf-8"?>
-<p:sld xmlns:a="http://schemas.openxmlformats.org/drawingml/2006/main" xmlns:r="http://schemas.openxmlformats.org/officeDocument/2006/relationships" xmlns:p="http://schemas.openxmlformats.org/presentationml/2006/main">
-  <p:cSld name="Slide 19">
-    <p:bg>
-      <p:bgPr>
-        <a:solidFill>
-          <a:srgbClr val="161826"/>
-        </a:solidFill>
-        <a:effectLst/>
-      </p:bgPr>
-    </p:bg>
-    <p:spTree>
-      <p:nvGrpSpPr>
-        <p:cNvPr id="1" name=""/>
-        <p:cNvGrpSpPr/>
-        <p:nvPr/>
-      </p:nvGrpSpPr>
-      <p:grpSpPr>
-        <a:xfrm>
-          <a:off x="0" y="0"/>
-          <a:ext cx="0" cy="0"/>
-          <a:chOff x="0" y="0"/>
-          <a:chExt cx="0" cy="0"/>
-        </a:xfrm>
-      </p:grpSpPr>
-      <p:sp>
-        <p:nvSpPr>
-          <p:cNvPr id="2" name="Text 0"/>
-          <p:cNvSpPr/>
-          <p:nvPr/>
-        </p:nvSpPr>
-        <p:spPr>
-          <a:xfrm>
-            <a:off x="1333500" y="4018657"/>
-            <a:ext cx="17183100" cy="451396"/>
-          </a:xfrm>
-          <a:prstGeom prst="rect">
-            <a:avLst/>
-          </a:prstGeom>
-          <a:noFill/>
-          <a:ln/>
-        </p:spPr>
-        <p:txBody>
-          <a:bodyPr wrap="square" lIns="25400" tIns="25400" rIns="25400" bIns="25400" rtlCol="0" anchor="t">
-            <a:normAutofit/>
-          </a:bodyPr>
-          <a:lstStyle/>
-          <a:p>
-            <a:pPr marL="0" indent="0" algn="l">
-              <a:lnSpc>
-                <a:spcPct val="135625"/>
-              </a:lnSpc>
-              <a:buNone/>
-            </a:pPr>
-            <a:r>
-              <a:rPr lang="en-US" sz="2100" kern="0" spc="294" dirty="0">
-                <a:solidFill>
-                  <a:srgbClr val="9184D9"/>
-                </a:solidFill>
-                <a:latin typeface="Arial" pitchFamily="34" charset="0"/>
-                <a:ea typeface="Arial" pitchFamily="34" charset="-122"/>
-                <a:cs typeface="Arial" pitchFamily="34" charset="-120"/>
-              </a:rPr>
-              <a:t>REFACTORING</a:t>
-            </a:r>
-            <a:endParaRPr lang="en-US" sz="2100" dirty="0"/>
-          </a:p>
-        </p:txBody>
-      </p:sp>
-      <p:sp>
-        <p:nvSpPr>
-          <p:cNvPr id="3" name="Text 1"/>
-          <p:cNvSpPr/>
-          <p:nvPr/>
-        </p:nvSpPr>
-        <p:spPr>
-          <a:xfrm>
-            <a:off x="1333500" y="4812953"/>
-            <a:ext cx="15304770" cy="1683841"/>
-          </a:xfrm>
-          <a:prstGeom prst="rect">
-            <a:avLst/>
-          </a:prstGeom>
-          <a:noFill/>
-          <a:ln/>
-        </p:spPr>
-        <p:txBody>
-          <a:bodyPr wrap="square" lIns="25400" tIns="25400" rIns="25400" bIns="25400" rtlCol="0" anchor="t">
-            <a:normAutofit lnSpcReduction="10000"/>
-          </a:bodyPr>
-          <a:lstStyle/>
-          <a:p>
-            <a:pPr marL="0" indent="0" algn="l">
-              <a:lnSpc>
-                <a:spcPct val="105366"/>
-              </a:lnSpc>
-              <a:buNone/>
-            </a:pPr>
-            <a:r>
-              <a:rPr lang="en-US" sz="5400" kern="0" spc="-135" dirty="0">
-                <a:solidFill>
-                  <a:srgbClr val="E9E9ED"/>
-                </a:solidFill>
-                <a:latin typeface="Arial" pitchFamily="34" charset="0"/>
-                <a:ea typeface="Arial" pitchFamily="34" charset="-122"/>
-                <a:cs typeface="Arial" pitchFamily="34" charset="-120"/>
-              </a:rPr>
-              <a:t>Changing internal structure without changing the </a:t>
-            </a:r>
-            <a:r>
-              <a:rPr lang="en-US" sz="5400" kern="0" spc="-135" dirty="0">
-                <a:solidFill>
-                  <a:srgbClr val="9184D9"/>
-                </a:solidFill>
-                <a:latin typeface="Arial" pitchFamily="34" charset="0"/>
-                <a:ea typeface="Arial" pitchFamily="34" charset="-122"/>
-                <a:cs typeface="Arial" pitchFamily="34" charset="-120"/>
-              </a:rPr>
-              <a:t>observable behavior</a:t>
-            </a:r>
-            <a:r>
-              <a:rPr lang="en-US" sz="5400" kern="0" spc="-135" dirty="0">
-                <a:solidFill>
-                  <a:srgbClr val="E9E9ED"/>
-                </a:solidFill>
-                <a:latin typeface="Arial" pitchFamily="34" charset="0"/>
-                <a:ea typeface="Arial" pitchFamily="34" charset="-122"/>
-                <a:cs typeface="Arial" pitchFamily="34" charset="-120"/>
-              </a:rPr>
-              <a:t>.</a:t>
-            </a:r>
-            <a:endParaRPr lang="en-US" sz="5400" dirty="0"/>
-          </a:p>
-        </p:txBody>
-      </p:sp>
-    </p:spTree>
-  </p:cSld>
-  <p:clrMapOvr>
-    <a:masterClrMapping/>
-  </p:clrMapOvr>
-</p:sld>
-</file>
-
 <file path=ppt/slides/slide22.xml><?xml version="1.0" encoding="utf-8"?>
-<p:sld xmlns:a="http://schemas.openxmlformats.org/drawingml/2006/main" xmlns:r="http://schemas.openxmlformats.org/officeDocument/2006/relationships" xmlns:p="http://schemas.openxmlformats.org/presentationml/2006/main">
-  <p:cSld name="Slide 20">
-    <p:bg>
-      <p:bgPr>
-        <a:solidFill>
-          <a:srgbClr val="161826"/>
-        </a:solidFill>
-        <a:effectLst/>
-      </p:bgPr>
-    </p:bg>
-    <p:spTree>
-      <p:nvGrpSpPr>
-        <p:cNvPr id="1" name=""/>
-        <p:cNvGrpSpPr/>
-        <p:nvPr/>
-      </p:nvGrpSpPr>
-      <p:grpSpPr>
-        <a:xfrm>
-          <a:off x="0" y="0"/>
-          <a:ext cx="0" cy="0"/>
-          <a:chOff x="0" y="0"/>
-          <a:chExt cx="0" cy="0"/>
-        </a:xfrm>
-      </p:grpSpPr>
-      <p:sp>
-        <p:nvSpPr>
-          <p:cNvPr id="2" name="Text 0"/>
-          <p:cNvSpPr/>
-          <p:nvPr/>
-        </p:nvSpPr>
-        <p:spPr>
-          <a:xfrm>
-            <a:off x="1333500" y="3218557"/>
-            <a:ext cx="17183100" cy="451396"/>
-          </a:xfrm>
-          <a:prstGeom prst="rect">
-            <a:avLst/>
-          </a:prstGeom>
-          <a:noFill/>
-          <a:ln/>
-        </p:spPr>
-        <p:txBody>
-          <a:bodyPr wrap="square" lIns="25400" tIns="25400" rIns="25400" bIns="25400" rtlCol="0" anchor="t">
-            <a:normAutofit/>
-          </a:bodyPr>
-          <a:lstStyle/>
-          <a:p>
-            <a:pPr marL="0" indent="0" algn="l">
-              <a:lnSpc>
-                <a:spcPct val="135625"/>
-              </a:lnSpc>
-              <a:buNone/>
-            </a:pPr>
-            <a:r>
-              <a:rPr lang="en-US" sz="2100" kern="0" spc="294" dirty="0">
-                <a:solidFill>
-                  <a:srgbClr val="9184D9"/>
-                </a:solidFill>
-                <a:latin typeface="Arial" pitchFamily="34" charset="0"/>
-                <a:ea typeface="Arial" pitchFamily="34" charset="-122"/>
-                <a:cs typeface="Arial" pitchFamily="34" charset="-120"/>
-              </a:rPr>
-              <a:t>REFACTORING</a:t>
-            </a:r>
-            <a:endParaRPr lang="en-US" sz="2100" dirty="0"/>
-          </a:p>
-        </p:txBody>
-      </p:sp>
-      <p:sp>
-        <p:nvSpPr>
-          <p:cNvPr id="3" name="Text 1"/>
-          <p:cNvSpPr/>
-          <p:nvPr/>
-        </p:nvSpPr>
-        <p:spPr>
-          <a:xfrm>
-            <a:off x="1333500" y="4012853"/>
-            <a:ext cx="15304770" cy="1683841"/>
-          </a:xfrm>
-          <a:prstGeom prst="rect">
-            <a:avLst/>
-          </a:prstGeom>
-          <a:noFill/>
-          <a:ln/>
-        </p:spPr>
-        <p:txBody>
-          <a:bodyPr wrap="square" lIns="25400" tIns="25400" rIns="25400" bIns="25400" rtlCol="0" anchor="t">
-            <a:normAutofit lnSpcReduction="10000"/>
-          </a:bodyPr>
-          <a:lstStyle/>
-          <a:p>
-            <a:pPr marL="0" indent="0" algn="l">
-              <a:lnSpc>
-                <a:spcPct val="105366"/>
-              </a:lnSpc>
-              <a:buNone/>
-            </a:pPr>
-            <a:r>
-              <a:rPr lang="en-US" sz="5400" kern="0" spc="-135" dirty="0">
-                <a:solidFill>
-                  <a:srgbClr val="E9E9ED"/>
-                </a:solidFill>
-                <a:latin typeface="Arial" pitchFamily="34" charset="0"/>
-                <a:ea typeface="Arial" pitchFamily="34" charset="-122"/>
-                <a:cs typeface="Arial" pitchFamily="34" charset="-120"/>
-              </a:rPr>
-              <a:t>Changing internal structure without changing the </a:t>
-            </a:r>
-            <a:r>
-              <a:rPr lang="en-US" sz="5400" kern="0" spc="-135" dirty="0">
-                <a:solidFill>
-                  <a:srgbClr val="9184D9"/>
-                </a:solidFill>
-                <a:latin typeface="Arial" pitchFamily="34" charset="0"/>
-                <a:ea typeface="Arial" pitchFamily="34" charset="-122"/>
-                <a:cs typeface="Arial" pitchFamily="34" charset="-120"/>
-              </a:rPr>
-              <a:t>observable behavior</a:t>
-            </a:r>
-            <a:r>
-              <a:rPr lang="en-US" sz="5400" kern="0" spc="-135" dirty="0">
-                <a:solidFill>
-                  <a:srgbClr val="E9E9ED"/>
-                </a:solidFill>
-                <a:latin typeface="Arial" pitchFamily="34" charset="0"/>
-                <a:ea typeface="Arial" pitchFamily="34" charset="-122"/>
-                <a:cs typeface="Arial" pitchFamily="34" charset="-120"/>
-              </a:rPr>
-              <a:t>.</a:t>
-            </a:r>
-            <a:endParaRPr lang="en-US" sz="5400" dirty="0"/>
-          </a:p>
-        </p:txBody>
-      </p:sp>
-      <p:sp>
-        <p:nvSpPr>
-          <p:cNvPr id="4" name="Text 2"/>
-          <p:cNvSpPr/>
-          <p:nvPr/>
-        </p:nvSpPr>
-        <p:spPr>
-          <a:xfrm>
-            <a:off x="1333500" y="6344394"/>
-            <a:ext cx="17183100" cy="952500"/>
-          </a:xfrm>
-          <a:prstGeom prst="rect">
-            <a:avLst/>
-          </a:prstGeom>
-          <a:noFill/>
-          <a:ln/>
-        </p:spPr>
-        <p:txBody>
-          <a:bodyPr wrap="square" lIns="25400" tIns="25400" rIns="25400" bIns="25400" rtlCol="0" anchor="t">
-            <a:normAutofit lnSpcReduction="10000"/>
-          </a:bodyPr>
-          <a:lstStyle/>
-          <a:p>
-            <a:pPr marL="0" indent="0" algn="l">
-              <a:lnSpc>
-                <a:spcPct val="87273"/>
-              </a:lnSpc>
-              <a:buNone/>
-            </a:pPr>
-            <a:r>
-              <a:rPr lang="en-US" sz="7200" kern="0" spc="-216" dirty="0">
-                <a:solidFill>
-                  <a:srgbClr val="9184D9"/>
-                </a:solidFill>
-                <a:latin typeface="Arial" pitchFamily="34" charset="0"/>
-                <a:ea typeface="Arial" pitchFamily="34" charset="-122"/>
-                <a:cs typeface="Arial" pitchFamily="34" charset="-120"/>
-              </a:rPr>
-              <a:t>Observable to whom?</a:t>
-            </a:r>
-            <a:endParaRPr lang="en-US" sz="7200" dirty="0"/>
-          </a:p>
-        </p:txBody>
-      </p:sp>
-    </p:spTree>
-  </p:cSld>
-  <p:clrMapOvr>
-    <a:masterClrMapping/>
-  </p:clrMapOvr>
-</p:sld>
-</file>
-
-<file path=ppt/slides/slide23.xml><?xml version="1.0" encoding="utf-8"?>
 <p:sld xmlns:a="http://schemas.openxmlformats.org/drawingml/2006/main" xmlns:r="http://schemas.openxmlformats.org/officeDocument/2006/relationships" xmlns:p="http://schemas.openxmlformats.org/presentationml/2006/main">
   <p:cSld name="Slide 21">
     <p:bg>
@@ -6818,9 +6564,9 @@
 </p:sld>
 </file>
 
-<file path=ppt/slides/slide24.xml><?xml version="1.0" encoding="utf-8"?>
+<file path=ppt/slides/slide23.xml><?xml version="1.0" encoding="utf-8"?>
 <p:sld xmlns:a="http://schemas.openxmlformats.org/drawingml/2006/main" xmlns:r="http://schemas.openxmlformats.org/officeDocument/2006/relationships" xmlns:p="http://schemas.openxmlformats.org/presentationml/2006/main">
-  <p:cSld name="Slide 22">
+  <p:cSld>
     <p:bg>
       <p:bgPr>
         <a:solidFill>
@@ -6831,7 +6577,13 @@
     </p:bg>
     <p:spTree>
       <p:nvGrpSpPr>
-        <p:cNvPr id="1" name=""/>
+        <p:cNvPr id="1" name="">
+          <a:extLst>
+            <a:ext uri="{FF2B5EF4-FFF2-40B4-BE49-F238E27FC236}">
+              <a16:creationId xmlns:a16="http://schemas.microsoft.com/office/drawing/2014/main" id="{431D7B75-2B5F-A3AE-73BD-6A95CB8802FF}"/>
+            </a:ext>
+          </a:extLst>
+        </p:cNvPr>
         <p:cNvGrpSpPr/>
         <p:nvPr/>
       </p:nvGrpSpPr>
@@ -6845,14 +6597,20 @@
       </p:grpSpPr>
       <p:sp>
         <p:nvSpPr>
-          <p:cNvPr id="2" name="Text 0"/>
-          <p:cNvSpPr/>
-          <p:nvPr/>
-        </p:nvSpPr>
-        <p:spPr>
-          <a:xfrm>
-            <a:off x="1333500" y="3360837"/>
-            <a:ext cx="15697200" cy="3793927"/>
+          <p:cNvPr id="2" name="Text 0">
+            <a:extLst>
+              <a:ext uri="{FF2B5EF4-FFF2-40B4-BE49-F238E27FC236}">
+                <a16:creationId xmlns:a16="http://schemas.microsoft.com/office/drawing/2014/main" id="{5968CFD2-C017-6632-E8F2-0A1A3B946ED3}"/>
+              </a:ext>
+            </a:extLst>
+          </p:cNvPr>
+          <p:cNvSpPr/>
+          <p:nvPr/>
+        </p:nvSpPr>
+        <p:spPr>
+          <a:xfrm>
+            <a:off x="1333500" y="3488382"/>
+            <a:ext cx="17183100" cy="647700"/>
           </a:xfrm>
           <a:prstGeom prst="rect">
             <a:avLst/>
@@ -6868,12 +6626,61 @@
           <a:p>
             <a:pPr marL="0" indent="0" algn="l">
               <a:lnSpc>
-                <a:spcPct val="92563"/>
-              </a:lnSpc>
-              <a:buNone/>
-            </a:pPr>
-            <a:r>
-              <a:rPr lang="en-US" sz="9300" kern="0" spc="-325" dirty="0">
+                <a:spcPct val="86486"/>
+              </a:lnSpc>
+              <a:buNone/>
+            </a:pPr>
+            <a:r>
+              <a:rPr lang="en-US" sz="4800" kern="0" spc="-96" dirty="0">
+                <a:solidFill>
+                  <a:srgbClr val="9184D9"/>
+                </a:solidFill>
+                <a:latin typeface="Arial" pitchFamily="34" charset="0"/>
+                <a:cs typeface="Arial" pitchFamily="34" charset="-120"/>
+              </a:rPr>
+              <a:t>legacy system specification</a:t>
+            </a:r>
+            <a:endParaRPr lang="en-US" sz="4800" dirty="0"/>
+          </a:p>
+        </p:txBody>
+      </p:sp>
+      <p:sp>
+        <p:nvSpPr>
+          <p:cNvPr id="3" name="Text 1">
+            <a:extLst>
+              <a:ext uri="{FF2B5EF4-FFF2-40B4-BE49-F238E27FC236}">
+                <a16:creationId xmlns:a16="http://schemas.microsoft.com/office/drawing/2014/main" id="{F4CB7CF1-26B3-6C5E-9E6E-5B85774C8E80}"/>
+              </a:ext>
+            </a:extLst>
+          </p:cNvPr>
+          <p:cNvSpPr/>
+          <p:nvPr/>
+        </p:nvSpPr>
+        <p:spPr>
+          <a:xfrm>
+            <a:off x="1333500" y="4555182"/>
+            <a:ext cx="15304770" cy="1403449"/>
+          </a:xfrm>
+          <a:prstGeom prst="rect">
+            <a:avLst/>
+          </a:prstGeom>
+          <a:noFill/>
+          <a:ln/>
+        </p:spPr>
+        <p:txBody>
+          <a:bodyPr wrap="square" lIns="25400" tIns="25400" rIns="25400" bIns="25400" rtlCol="0" anchor="t">
+            <a:normAutofit/>
+          </a:bodyPr>
+          <a:lstStyle/>
+          <a:p>
+            <a:pPr marL="0" indent="0" algn="l">
+              <a:lnSpc>
+                <a:spcPct val="110277"/>
+              </a:lnSpc>
+              <a:buNone/>
+            </a:pPr>
+            <a:r>
+              <a:rPr lang="en-US" sz="4200" kern="0" spc="-84" dirty="0">
                 <a:solidFill>
                   <a:srgbClr val="E9E9ED"/>
                 </a:solidFill>
@@ -6881,13 +6688,18 @@
                 <a:ea typeface="Arial" pitchFamily="34" charset="-122"/>
                 <a:cs typeface="Arial" pitchFamily="34" charset="-120"/>
               </a:rPr>
-              <a:t>What must remain true at the edges, no matter what else changes.</a:t>
-            </a:r>
-            <a:endParaRPr lang="en-US" sz="9300" dirty="0"/>
+              <a:t>What must remain true at the edges no matter what else changes</a:t>
+            </a:r>
+            <a:endParaRPr lang="en-US" sz="4200" dirty="0"/>
           </a:p>
         </p:txBody>
       </p:sp>
     </p:spTree>
+    <p:extLst>
+      <p:ext uri="{BB962C8B-B14F-4D97-AF65-F5344CB8AC3E}">
+        <p14:creationId xmlns:p14="http://schemas.microsoft.com/office/powerpoint/2010/main" val="1496085008"/>
+      </p:ext>
+    </p:extLst>
   </p:cSld>
   <p:clrMapOvr>
     <a:masterClrMapping/>
@@ -6895,7 +6707,7 @@
 </p:sld>
 </file>
 
-<file path=ppt/slides/slide25.xml><?xml version="1.0" encoding="utf-8"?>
+<file path=ppt/slides/slide24.xml><?xml version="1.0" encoding="utf-8"?>
 <p:sld xmlns:a="http://schemas.openxmlformats.org/drawingml/2006/main" xmlns:r="http://schemas.openxmlformats.org/officeDocument/2006/relationships" xmlns:p="http://schemas.openxmlformats.org/presentationml/2006/main">
   <p:cSld name="Slide 23">
     <p:bg>
@@ -7615,7 +7427,7 @@
 </p:sld>
 </file>
 
-<file path=ppt/slides/slide26.xml><?xml version="1.0" encoding="utf-8"?>
+<file path=ppt/slides/slide25.xml><?xml version="1.0" encoding="utf-8"?>
 <p:sld xmlns:a="http://schemas.openxmlformats.org/drawingml/2006/main" xmlns:r="http://schemas.openxmlformats.org/officeDocument/2006/relationships" xmlns:p="http://schemas.openxmlformats.org/presentationml/2006/main">
   <p:cSld name="Slide 24">
     <p:bg>
@@ -7945,7 +7757,7 @@
 </p:sld>
 </file>
 
-<file path=ppt/slides/slide27.xml><?xml version="1.0" encoding="utf-8"?>
+<file path=ppt/slides/slide26.xml><?xml version="1.0" encoding="utf-8"?>
 <p:sld xmlns:a="http://schemas.openxmlformats.org/drawingml/2006/main" xmlns:r="http://schemas.openxmlformats.org/officeDocument/2006/relationships" xmlns:p="http://schemas.openxmlformats.org/presentationml/2006/main">
   <p:cSld name="Slide 25">
     <p:bg>
@@ -8088,7 +7900,7 @@
 </p:sld>
 </file>
 
-<file path=ppt/slides/slide28.xml><?xml version="1.0" encoding="utf-8"?>
+<file path=ppt/slides/slide27.xml><?xml version="1.0" encoding="utf-8"?>
 <p:sld xmlns:a="http://schemas.openxmlformats.org/drawingml/2006/main" xmlns:r="http://schemas.openxmlformats.org/officeDocument/2006/relationships" xmlns:p="http://schemas.openxmlformats.org/presentationml/2006/main">
   <p:cSld name="Slide 26">
     <p:bg>
@@ -8209,7 +8021,7 @@
 </p:sld>
 </file>
 
-<file path=ppt/slides/slide29.xml><?xml version="1.0" encoding="utf-8"?>
+<file path=ppt/slides/slide28.xml><?xml version="1.0" encoding="utf-8"?>
 <p:sld xmlns:a="http://schemas.openxmlformats.org/drawingml/2006/main" xmlns:r="http://schemas.openxmlformats.org/officeDocument/2006/relationships" xmlns:p="http://schemas.openxmlformats.org/presentationml/2006/main">
   <p:cSld name="Slide 27">
     <p:bg>
@@ -8407,6 +8219,374 @@
               <a:t>On their own they pin everything equally. The edges tell you which of it counts.</a:t>
             </a:r>
             <a:endParaRPr lang="en-US" sz="3300" dirty="0"/>
+          </a:p>
+        </p:txBody>
+      </p:sp>
+    </p:spTree>
+  </p:cSld>
+  <p:clrMapOvr>
+    <a:masterClrMapping/>
+  </p:clrMapOvr>
+</p:sld>
+</file>
+
+<file path=ppt/slides/slide29.xml><?xml version="1.0" encoding="utf-8"?>
+<p:sld xmlns:a="http://schemas.openxmlformats.org/drawingml/2006/main" xmlns:r="http://schemas.openxmlformats.org/officeDocument/2006/relationships" xmlns:p="http://schemas.openxmlformats.org/presentationml/2006/main">
+  <p:cSld name="Slide 28">
+    <p:bg>
+      <p:bgPr>
+        <a:solidFill>
+          <a:srgbClr val="161826"/>
+        </a:solidFill>
+        <a:effectLst/>
+      </p:bgPr>
+    </p:bg>
+    <p:spTree>
+      <p:nvGrpSpPr>
+        <p:cNvPr id="1" name=""/>
+        <p:cNvGrpSpPr/>
+        <p:nvPr/>
+      </p:nvGrpSpPr>
+      <p:grpSpPr>
+        <a:xfrm>
+          <a:off x="0" y="0"/>
+          <a:ext cx="0" cy="0"/>
+          <a:chOff x="0" y="0"/>
+          <a:chExt cx="0" cy="0"/>
+        </a:xfrm>
+      </p:grpSpPr>
+      <p:sp>
+        <p:nvSpPr>
+          <p:cNvPr id="2" name="Shape 0"/>
+          <p:cNvSpPr/>
+          <p:nvPr/>
+        </p:nvSpPr>
+        <p:spPr>
+          <a:xfrm>
+            <a:off x="1333500" y="2802582"/>
+            <a:ext cx="533400" cy="28575"/>
+          </a:xfrm>
+          <a:prstGeom prst="rect">
+            <a:avLst/>
+          </a:prstGeom>
+          <a:solidFill>
+            <a:srgbClr val="9184D9"/>
+          </a:solidFill>
+          <a:ln/>
+        </p:spPr>
+        <p:txBody>
+          <a:bodyPr/>
+          <a:lstStyle/>
+          <a:p>
+            <a:endParaRPr lang="en-US"/>
+          </a:p>
+        </p:txBody>
+      </p:sp>
+      <p:sp>
+        <p:nvSpPr>
+          <p:cNvPr id="3" name="Text 1"/>
+          <p:cNvSpPr/>
+          <p:nvPr/>
+        </p:nvSpPr>
+        <p:spPr>
+          <a:xfrm>
+            <a:off x="1333500" y="3212157"/>
+            <a:ext cx="17183100" cy="572988"/>
+          </a:xfrm>
+          <a:prstGeom prst="rect">
+            <a:avLst/>
+          </a:prstGeom>
+          <a:noFill/>
+          <a:ln/>
+        </p:spPr>
+        <p:txBody>
+          <a:bodyPr wrap="square" lIns="25400" tIns="25400" rIns="25400" bIns="25400" rtlCol="0" anchor="t">
+            <a:normAutofit lnSpcReduction="10000"/>
+          </a:bodyPr>
+          <a:lstStyle/>
+          <a:p>
+            <a:pPr marL="0" indent="0" algn="l">
+              <a:lnSpc>
+                <a:spcPct val="93600"/>
+              </a:lnSpc>
+              <a:buNone/>
+            </a:pPr>
+            <a:r>
+              <a:rPr lang="en-US" sz="3900" kern="0" spc="-78" dirty="0">
+                <a:solidFill>
+                  <a:srgbClr val="E9E9ED"/>
+                </a:solidFill>
+                <a:latin typeface="Arial" pitchFamily="34" charset="0"/>
+                <a:ea typeface="Arial" pitchFamily="34" charset="-122"/>
+                <a:cs typeface="Arial" pitchFamily="34" charset="-120"/>
+              </a:rPr>
+              <a:t>The workflow</a:t>
+            </a:r>
+            <a:endParaRPr lang="en-US" sz="3900" dirty="0"/>
+          </a:p>
+        </p:txBody>
+      </p:sp>
+      <p:sp>
+        <p:nvSpPr>
+          <p:cNvPr id="4" name="Text 2"/>
+          <p:cNvSpPr/>
+          <p:nvPr/>
+        </p:nvSpPr>
+        <p:spPr>
+          <a:xfrm>
+            <a:off x="1333500" y="4280446"/>
+            <a:ext cx="1362075" cy="571500"/>
+          </a:xfrm>
+          <a:prstGeom prst="rect">
+            <a:avLst/>
+          </a:prstGeom>
+          <a:noFill/>
+          <a:ln/>
+        </p:spPr>
+        <p:txBody>
+          <a:bodyPr wrap="square" lIns="25400" tIns="25400" rIns="25400" bIns="25400" rtlCol="0" anchor="t">
+            <a:normAutofit lnSpcReduction="10000"/>
+          </a:bodyPr>
+          <a:lstStyle/>
+          <a:p>
+            <a:pPr marL="0" indent="0" algn="l">
+              <a:lnSpc>
+                <a:spcPct val="86154"/>
+              </a:lnSpc>
+              <a:buNone/>
+            </a:pPr>
+            <a:r>
+              <a:rPr lang="en-US" sz="4200" kern="0" spc="-84" dirty="0">
+                <a:solidFill>
+                  <a:srgbClr val="9184D9"/>
+                </a:solidFill>
+                <a:latin typeface="Arial" pitchFamily="34" charset="0"/>
+                <a:ea typeface="Arial" pitchFamily="34" charset="-122"/>
+                <a:cs typeface="Arial" pitchFamily="34" charset="-120"/>
+              </a:rPr>
+              <a:t>01</a:t>
+            </a:r>
+            <a:endParaRPr lang="en-US" sz="4200" dirty="0"/>
+          </a:p>
+        </p:txBody>
+      </p:sp>
+      <p:sp>
+        <p:nvSpPr>
+          <p:cNvPr id="5" name="Text 3"/>
+          <p:cNvSpPr/>
+          <p:nvPr/>
+        </p:nvSpPr>
+        <p:spPr>
+          <a:xfrm>
+            <a:off x="3028950" y="4280446"/>
+            <a:ext cx="15318105" cy="658118"/>
+          </a:xfrm>
+          <a:prstGeom prst="rect">
+            <a:avLst/>
+          </a:prstGeom>
+          <a:noFill/>
+          <a:ln/>
+        </p:spPr>
+        <p:txBody>
+          <a:bodyPr wrap="square" lIns="25400" tIns="25400" rIns="25400" bIns="25400" rtlCol="0" anchor="t">
+            <a:normAutofit/>
+          </a:bodyPr>
+          <a:lstStyle/>
+          <a:p>
+            <a:pPr marL="0" indent="0" algn="l">
+              <a:lnSpc>
+                <a:spcPct val="135625"/>
+              </a:lnSpc>
+              <a:buNone/>
+            </a:pPr>
+            <a:r>
+              <a:rPr lang="en-US" sz="3150" dirty="0">
+                <a:solidFill>
+                  <a:srgbClr val="E9E9ED"/>
+                </a:solidFill>
+                <a:latin typeface="Arial" pitchFamily="34" charset="0"/>
+                <a:ea typeface="Arial" pitchFamily="34" charset="-122"/>
+                <a:cs typeface="Arial" pitchFamily="34" charset="-120"/>
+              </a:rPr>
+              <a:t>Give the agent full context of the app</a:t>
+            </a:r>
+            <a:endParaRPr lang="en-US" sz="3150" dirty="0"/>
+          </a:p>
+        </p:txBody>
+      </p:sp>
+      <p:sp>
+        <p:nvSpPr>
+          <p:cNvPr id="6" name="Text 4"/>
+          <p:cNvSpPr/>
+          <p:nvPr/>
+        </p:nvSpPr>
+        <p:spPr>
+          <a:xfrm>
+            <a:off x="1333500" y="5357664"/>
+            <a:ext cx="1362075" cy="571500"/>
+          </a:xfrm>
+          <a:prstGeom prst="rect">
+            <a:avLst/>
+          </a:prstGeom>
+          <a:noFill/>
+          <a:ln/>
+        </p:spPr>
+        <p:txBody>
+          <a:bodyPr wrap="square" lIns="25400" tIns="25400" rIns="25400" bIns="25400" rtlCol="0" anchor="t">
+            <a:normAutofit lnSpcReduction="10000"/>
+          </a:bodyPr>
+          <a:lstStyle/>
+          <a:p>
+            <a:pPr marL="0" indent="0" algn="l">
+              <a:lnSpc>
+                <a:spcPct val="86154"/>
+              </a:lnSpc>
+              <a:buNone/>
+            </a:pPr>
+            <a:r>
+              <a:rPr lang="en-US" sz="4200" kern="0" spc="-84" dirty="0">
+                <a:solidFill>
+                  <a:srgbClr val="9184D9"/>
+                </a:solidFill>
+                <a:latin typeface="Arial" pitchFamily="34" charset="0"/>
+                <a:ea typeface="Arial" pitchFamily="34" charset="-122"/>
+                <a:cs typeface="Arial" pitchFamily="34" charset="-120"/>
+              </a:rPr>
+              <a:t>02</a:t>
+            </a:r>
+            <a:endParaRPr lang="en-US" sz="4200" dirty="0"/>
+          </a:p>
+        </p:txBody>
+      </p:sp>
+      <p:sp>
+        <p:nvSpPr>
+          <p:cNvPr id="7" name="Text 5"/>
+          <p:cNvSpPr/>
+          <p:nvPr/>
+        </p:nvSpPr>
+        <p:spPr>
+          <a:xfrm>
+            <a:off x="3028950" y="5357664"/>
+            <a:ext cx="14343317" cy="1278136"/>
+          </a:xfrm>
+          <a:prstGeom prst="rect">
+            <a:avLst/>
+          </a:prstGeom>
+          <a:noFill/>
+          <a:ln/>
+        </p:spPr>
+        <p:txBody>
+          <a:bodyPr wrap="square" lIns="25400" tIns="25400" rIns="25400" bIns="25400" rtlCol="0" anchor="t">
+            <a:normAutofit lnSpcReduction="10000"/>
+          </a:bodyPr>
+          <a:lstStyle/>
+          <a:p>
+            <a:pPr marL="0" indent="0" algn="l">
+              <a:lnSpc>
+                <a:spcPct val="135625"/>
+              </a:lnSpc>
+              <a:buNone/>
+            </a:pPr>
+            <a:r>
+              <a:rPr lang="en-US" sz="3150" dirty="0">
+                <a:solidFill>
+                  <a:srgbClr val="E9E9ED"/>
+                </a:solidFill>
+                <a:latin typeface="Arial" pitchFamily="34" charset="0"/>
+                <a:ea typeface="Arial" pitchFamily="34" charset="-122"/>
+                <a:cs typeface="Arial" pitchFamily="34" charset="-120"/>
+              </a:rPr>
+              <a:t>Have it document data flows, invariants, and unexpected behaviors — then read them</a:t>
+            </a:r>
+            <a:endParaRPr lang="en-US" sz="3150" dirty="0"/>
+          </a:p>
+        </p:txBody>
+      </p:sp>
+      <p:sp>
+        <p:nvSpPr>
+          <p:cNvPr id="8" name="Text 6"/>
+          <p:cNvSpPr/>
+          <p:nvPr/>
+        </p:nvSpPr>
+        <p:spPr>
+          <a:xfrm>
+            <a:off x="1333500" y="7054900"/>
+            <a:ext cx="1362075" cy="571500"/>
+          </a:xfrm>
+          <a:prstGeom prst="rect">
+            <a:avLst/>
+          </a:prstGeom>
+          <a:noFill/>
+          <a:ln/>
+        </p:spPr>
+        <p:txBody>
+          <a:bodyPr wrap="square" lIns="25400" tIns="25400" rIns="25400" bIns="25400" rtlCol="0" anchor="t">
+            <a:normAutofit lnSpcReduction="10000"/>
+          </a:bodyPr>
+          <a:lstStyle/>
+          <a:p>
+            <a:pPr marL="0" indent="0" algn="l">
+              <a:lnSpc>
+                <a:spcPct val="86154"/>
+              </a:lnSpc>
+              <a:buNone/>
+            </a:pPr>
+            <a:r>
+              <a:rPr lang="en-US" sz="4200" kern="0" spc="-84" dirty="0">
+                <a:solidFill>
+                  <a:srgbClr val="9184D9"/>
+                </a:solidFill>
+                <a:latin typeface="Arial" pitchFamily="34" charset="0"/>
+                <a:ea typeface="Arial" pitchFamily="34" charset="-122"/>
+                <a:cs typeface="Arial" pitchFamily="34" charset="-120"/>
+              </a:rPr>
+              <a:t>03</a:t>
+            </a:r>
+            <a:endParaRPr lang="en-US" sz="4200" dirty="0"/>
+          </a:p>
+        </p:txBody>
+      </p:sp>
+      <p:sp>
+        <p:nvSpPr>
+          <p:cNvPr id="9" name="Text 7"/>
+          <p:cNvSpPr/>
+          <p:nvPr/>
+        </p:nvSpPr>
+        <p:spPr>
+          <a:xfrm>
+            <a:off x="3028950" y="7054900"/>
+            <a:ext cx="15318105" cy="658118"/>
+          </a:xfrm>
+          <a:prstGeom prst="rect">
+            <a:avLst/>
+          </a:prstGeom>
+          <a:noFill/>
+          <a:ln/>
+        </p:spPr>
+        <p:txBody>
+          <a:bodyPr wrap="square" lIns="25400" tIns="25400" rIns="25400" bIns="25400" rtlCol="0" anchor="t">
+            <a:normAutofit/>
+          </a:bodyPr>
+          <a:lstStyle/>
+          <a:p>
+            <a:pPr marL="0" indent="0" algn="l">
+              <a:lnSpc>
+                <a:spcPct val="135625"/>
+              </a:lnSpc>
+              <a:buNone/>
+            </a:pPr>
+            <a:r>
+              <a:rPr lang="en-US" sz="3150" dirty="0">
+                <a:solidFill>
+                  <a:srgbClr val="E9E9ED"/>
+                </a:solidFill>
+                <a:latin typeface="Arial" pitchFamily="34" charset="0"/>
+                <a:ea typeface="Arial" pitchFamily="34" charset="-122"/>
+                <a:cs typeface="Arial" pitchFamily="34" charset="-120"/>
+              </a:rPr>
+              <a:t>Prompt for the characterization suite</a:t>
+            </a:r>
+            <a:endParaRPr lang="en-US" sz="3150" dirty="0"/>
           </a:p>
         </p:txBody>
       </p:sp>
@@ -8656,374 +8836,6 @@
 
 <file path=ppt/slides/slide30.xml><?xml version="1.0" encoding="utf-8"?>
 <p:sld xmlns:a="http://schemas.openxmlformats.org/drawingml/2006/main" xmlns:r="http://schemas.openxmlformats.org/officeDocument/2006/relationships" xmlns:p="http://schemas.openxmlformats.org/presentationml/2006/main">
-  <p:cSld name="Slide 28">
-    <p:bg>
-      <p:bgPr>
-        <a:solidFill>
-          <a:srgbClr val="161826"/>
-        </a:solidFill>
-        <a:effectLst/>
-      </p:bgPr>
-    </p:bg>
-    <p:spTree>
-      <p:nvGrpSpPr>
-        <p:cNvPr id="1" name=""/>
-        <p:cNvGrpSpPr/>
-        <p:nvPr/>
-      </p:nvGrpSpPr>
-      <p:grpSpPr>
-        <a:xfrm>
-          <a:off x="0" y="0"/>
-          <a:ext cx="0" cy="0"/>
-          <a:chOff x="0" y="0"/>
-          <a:chExt cx="0" cy="0"/>
-        </a:xfrm>
-      </p:grpSpPr>
-      <p:sp>
-        <p:nvSpPr>
-          <p:cNvPr id="2" name="Shape 0"/>
-          <p:cNvSpPr/>
-          <p:nvPr/>
-        </p:nvSpPr>
-        <p:spPr>
-          <a:xfrm>
-            <a:off x="1333500" y="2802582"/>
-            <a:ext cx="533400" cy="28575"/>
-          </a:xfrm>
-          <a:prstGeom prst="rect">
-            <a:avLst/>
-          </a:prstGeom>
-          <a:solidFill>
-            <a:srgbClr val="9184D9"/>
-          </a:solidFill>
-          <a:ln/>
-        </p:spPr>
-        <p:txBody>
-          <a:bodyPr/>
-          <a:lstStyle/>
-          <a:p>
-            <a:endParaRPr lang="en-US"/>
-          </a:p>
-        </p:txBody>
-      </p:sp>
-      <p:sp>
-        <p:nvSpPr>
-          <p:cNvPr id="3" name="Text 1"/>
-          <p:cNvSpPr/>
-          <p:nvPr/>
-        </p:nvSpPr>
-        <p:spPr>
-          <a:xfrm>
-            <a:off x="1333500" y="3212157"/>
-            <a:ext cx="17183100" cy="572988"/>
-          </a:xfrm>
-          <a:prstGeom prst="rect">
-            <a:avLst/>
-          </a:prstGeom>
-          <a:noFill/>
-          <a:ln/>
-        </p:spPr>
-        <p:txBody>
-          <a:bodyPr wrap="square" lIns="25400" tIns="25400" rIns="25400" bIns="25400" rtlCol="0" anchor="t">
-            <a:normAutofit lnSpcReduction="10000"/>
-          </a:bodyPr>
-          <a:lstStyle/>
-          <a:p>
-            <a:pPr marL="0" indent="0" algn="l">
-              <a:lnSpc>
-                <a:spcPct val="93600"/>
-              </a:lnSpc>
-              <a:buNone/>
-            </a:pPr>
-            <a:r>
-              <a:rPr lang="en-US" sz="3900" kern="0" spc="-78" dirty="0">
-                <a:solidFill>
-                  <a:srgbClr val="E9E9ED"/>
-                </a:solidFill>
-                <a:latin typeface="Arial" pitchFamily="34" charset="0"/>
-                <a:ea typeface="Arial" pitchFamily="34" charset="-122"/>
-                <a:cs typeface="Arial" pitchFamily="34" charset="-120"/>
-              </a:rPr>
-              <a:t>The workflow</a:t>
-            </a:r>
-            <a:endParaRPr lang="en-US" sz="3900" dirty="0"/>
-          </a:p>
-        </p:txBody>
-      </p:sp>
-      <p:sp>
-        <p:nvSpPr>
-          <p:cNvPr id="4" name="Text 2"/>
-          <p:cNvSpPr/>
-          <p:nvPr/>
-        </p:nvSpPr>
-        <p:spPr>
-          <a:xfrm>
-            <a:off x="1333500" y="4280446"/>
-            <a:ext cx="1362075" cy="571500"/>
-          </a:xfrm>
-          <a:prstGeom prst="rect">
-            <a:avLst/>
-          </a:prstGeom>
-          <a:noFill/>
-          <a:ln/>
-        </p:spPr>
-        <p:txBody>
-          <a:bodyPr wrap="square" lIns="25400" tIns="25400" rIns="25400" bIns="25400" rtlCol="0" anchor="t">
-            <a:normAutofit lnSpcReduction="10000"/>
-          </a:bodyPr>
-          <a:lstStyle/>
-          <a:p>
-            <a:pPr marL="0" indent="0" algn="l">
-              <a:lnSpc>
-                <a:spcPct val="86154"/>
-              </a:lnSpc>
-              <a:buNone/>
-            </a:pPr>
-            <a:r>
-              <a:rPr lang="en-US" sz="4200" kern="0" spc="-84" dirty="0">
-                <a:solidFill>
-                  <a:srgbClr val="9184D9"/>
-                </a:solidFill>
-                <a:latin typeface="Arial" pitchFamily="34" charset="0"/>
-                <a:ea typeface="Arial" pitchFamily="34" charset="-122"/>
-                <a:cs typeface="Arial" pitchFamily="34" charset="-120"/>
-              </a:rPr>
-              <a:t>01</a:t>
-            </a:r>
-            <a:endParaRPr lang="en-US" sz="4200" dirty="0"/>
-          </a:p>
-        </p:txBody>
-      </p:sp>
-      <p:sp>
-        <p:nvSpPr>
-          <p:cNvPr id="5" name="Text 3"/>
-          <p:cNvSpPr/>
-          <p:nvPr/>
-        </p:nvSpPr>
-        <p:spPr>
-          <a:xfrm>
-            <a:off x="3028950" y="4280446"/>
-            <a:ext cx="15318105" cy="658118"/>
-          </a:xfrm>
-          <a:prstGeom prst="rect">
-            <a:avLst/>
-          </a:prstGeom>
-          <a:noFill/>
-          <a:ln/>
-        </p:spPr>
-        <p:txBody>
-          <a:bodyPr wrap="square" lIns="25400" tIns="25400" rIns="25400" bIns="25400" rtlCol="0" anchor="t">
-            <a:normAutofit/>
-          </a:bodyPr>
-          <a:lstStyle/>
-          <a:p>
-            <a:pPr marL="0" indent="0" algn="l">
-              <a:lnSpc>
-                <a:spcPct val="135625"/>
-              </a:lnSpc>
-              <a:buNone/>
-            </a:pPr>
-            <a:r>
-              <a:rPr lang="en-US" sz="3150" dirty="0">
-                <a:solidFill>
-                  <a:srgbClr val="E9E9ED"/>
-                </a:solidFill>
-                <a:latin typeface="Arial" pitchFamily="34" charset="0"/>
-                <a:ea typeface="Arial" pitchFamily="34" charset="-122"/>
-                <a:cs typeface="Arial" pitchFamily="34" charset="-120"/>
-              </a:rPr>
-              <a:t>Give the agent full context of the app</a:t>
-            </a:r>
-            <a:endParaRPr lang="en-US" sz="3150" dirty="0"/>
-          </a:p>
-        </p:txBody>
-      </p:sp>
-      <p:sp>
-        <p:nvSpPr>
-          <p:cNvPr id="6" name="Text 4"/>
-          <p:cNvSpPr/>
-          <p:nvPr/>
-        </p:nvSpPr>
-        <p:spPr>
-          <a:xfrm>
-            <a:off x="1333500" y="5357664"/>
-            <a:ext cx="1362075" cy="571500"/>
-          </a:xfrm>
-          <a:prstGeom prst="rect">
-            <a:avLst/>
-          </a:prstGeom>
-          <a:noFill/>
-          <a:ln/>
-        </p:spPr>
-        <p:txBody>
-          <a:bodyPr wrap="square" lIns="25400" tIns="25400" rIns="25400" bIns="25400" rtlCol="0" anchor="t">
-            <a:normAutofit lnSpcReduction="10000"/>
-          </a:bodyPr>
-          <a:lstStyle/>
-          <a:p>
-            <a:pPr marL="0" indent="0" algn="l">
-              <a:lnSpc>
-                <a:spcPct val="86154"/>
-              </a:lnSpc>
-              <a:buNone/>
-            </a:pPr>
-            <a:r>
-              <a:rPr lang="en-US" sz="4200" kern="0" spc="-84" dirty="0">
-                <a:solidFill>
-                  <a:srgbClr val="9184D9"/>
-                </a:solidFill>
-                <a:latin typeface="Arial" pitchFamily="34" charset="0"/>
-                <a:ea typeface="Arial" pitchFamily="34" charset="-122"/>
-                <a:cs typeface="Arial" pitchFamily="34" charset="-120"/>
-              </a:rPr>
-              <a:t>02</a:t>
-            </a:r>
-            <a:endParaRPr lang="en-US" sz="4200" dirty="0"/>
-          </a:p>
-        </p:txBody>
-      </p:sp>
-      <p:sp>
-        <p:nvSpPr>
-          <p:cNvPr id="7" name="Text 5"/>
-          <p:cNvSpPr/>
-          <p:nvPr/>
-        </p:nvSpPr>
-        <p:spPr>
-          <a:xfrm>
-            <a:off x="3028950" y="5357664"/>
-            <a:ext cx="14343317" cy="1278136"/>
-          </a:xfrm>
-          <a:prstGeom prst="rect">
-            <a:avLst/>
-          </a:prstGeom>
-          <a:noFill/>
-          <a:ln/>
-        </p:spPr>
-        <p:txBody>
-          <a:bodyPr wrap="square" lIns="25400" tIns="25400" rIns="25400" bIns="25400" rtlCol="0" anchor="t">
-            <a:normAutofit lnSpcReduction="10000"/>
-          </a:bodyPr>
-          <a:lstStyle/>
-          <a:p>
-            <a:pPr marL="0" indent="0" algn="l">
-              <a:lnSpc>
-                <a:spcPct val="135625"/>
-              </a:lnSpc>
-              <a:buNone/>
-            </a:pPr>
-            <a:r>
-              <a:rPr lang="en-US" sz="3150" dirty="0">
-                <a:solidFill>
-                  <a:srgbClr val="E9E9ED"/>
-                </a:solidFill>
-                <a:latin typeface="Arial" pitchFamily="34" charset="0"/>
-                <a:ea typeface="Arial" pitchFamily="34" charset="-122"/>
-                <a:cs typeface="Arial" pitchFamily="34" charset="-120"/>
-              </a:rPr>
-              <a:t>Have it document data flows, invariants, and unexpected behaviors — then read them</a:t>
-            </a:r>
-            <a:endParaRPr lang="en-US" sz="3150" dirty="0"/>
-          </a:p>
-        </p:txBody>
-      </p:sp>
-      <p:sp>
-        <p:nvSpPr>
-          <p:cNvPr id="8" name="Text 6"/>
-          <p:cNvSpPr/>
-          <p:nvPr/>
-        </p:nvSpPr>
-        <p:spPr>
-          <a:xfrm>
-            <a:off x="1333500" y="7054900"/>
-            <a:ext cx="1362075" cy="571500"/>
-          </a:xfrm>
-          <a:prstGeom prst="rect">
-            <a:avLst/>
-          </a:prstGeom>
-          <a:noFill/>
-          <a:ln/>
-        </p:spPr>
-        <p:txBody>
-          <a:bodyPr wrap="square" lIns="25400" tIns="25400" rIns="25400" bIns="25400" rtlCol="0" anchor="t">
-            <a:normAutofit lnSpcReduction="10000"/>
-          </a:bodyPr>
-          <a:lstStyle/>
-          <a:p>
-            <a:pPr marL="0" indent="0" algn="l">
-              <a:lnSpc>
-                <a:spcPct val="86154"/>
-              </a:lnSpc>
-              <a:buNone/>
-            </a:pPr>
-            <a:r>
-              <a:rPr lang="en-US" sz="4200" kern="0" spc="-84" dirty="0">
-                <a:solidFill>
-                  <a:srgbClr val="9184D9"/>
-                </a:solidFill>
-                <a:latin typeface="Arial" pitchFamily="34" charset="0"/>
-                <a:ea typeface="Arial" pitchFamily="34" charset="-122"/>
-                <a:cs typeface="Arial" pitchFamily="34" charset="-120"/>
-              </a:rPr>
-              <a:t>03</a:t>
-            </a:r>
-            <a:endParaRPr lang="en-US" sz="4200" dirty="0"/>
-          </a:p>
-        </p:txBody>
-      </p:sp>
-      <p:sp>
-        <p:nvSpPr>
-          <p:cNvPr id="9" name="Text 7"/>
-          <p:cNvSpPr/>
-          <p:nvPr/>
-        </p:nvSpPr>
-        <p:spPr>
-          <a:xfrm>
-            <a:off x="3028950" y="7054900"/>
-            <a:ext cx="15318105" cy="658118"/>
-          </a:xfrm>
-          <a:prstGeom prst="rect">
-            <a:avLst/>
-          </a:prstGeom>
-          <a:noFill/>
-          <a:ln/>
-        </p:spPr>
-        <p:txBody>
-          <a:bodyPr wrap="square" lIns="25400" tIns="25400" rIns="25400" bIns="25400" rtlCol="0" anchor="t">
-            <a:normAutofit/>
-          </a:bodyPr>
-          <a:lstStyle/>
-          <a:p>
-            <a:pPr marL="0" indent="0" algn="l">
-              <a:lnSpc>
-                <a:spcPct val="135625"/>
-              </a:lnSpc>
-              <a:buNone/>
-            </a:pPr>
-            <a:r>
-              <a:rPr lang="en-US" sz="3150" dirty="0">
-                <a:solidFill>
-                  <a:srgbClr val="E9E9ED"/>
-                </a:solidFill>
-                <a:latin typeface="Arial" pitchFamily="34" charset="0"/>
-                <a:ea typeface="Arial" pitchFamily="34" charset="-122"/>
-                <a:cs typeface="Arial" pitchFamily="34" charset="-120"/>
-              </a:rPr>
-              <a:t>Prompt for the characterization suite</a:t>
-            </a:r>
-            <a:endParaRPr lang="en-US" sz="3150" dirty="0"/>
-          </a:p>
-        </p:txBody>
-      </p:sp>
-    </p:spTree>
-  </p:cSld>
-  <p:clrMapOvr>
-    <a:masterClrMapping/>
-  </p:clrMapOvr>
-</p:sld>
-</file>
-
-<file path=ppt/slides/slide31.xml><?xml version="1.0" encoding="utf-8"?>
-<p:sld xmlns:a="http://schemas.openxmlformats.org/drawingml/2006/main" xmlns:r="http://schemas.openxmlformats.org/officeDocument/2006/relationships" xmlns:p="http://schemas.openxmlformats.org/presentationml/2006/main">
   <p:cSld name="Slide 29">
     <p:bg>
       <p:bgPr>
@@ -9390,7 +9202,7 @@
 </p:sld>
 </file>
 
-<file path=ppt/slides/slide32.xml><?xml version="1.0" encoding="utf-8"?>
+<file path=ppt/slides/slide31.xml><?xml version="1.0" encoding="utf-8"?>
 <p:sld xmlns:a="http://schemas.openxmlformats.org/drawingml/2006/main" xmlns:r="http://schemas.openxmlformats.org/officeDocument/2006/relationships" xmlns:p="http://schemas.openxmlformats.org/presentationml/2006/main">
   <p:cSld name="Slide 30">
     <p:bg>
@@ -9555,7 +9367,7 @@
 </p:sld>
 </file>
 
-<file path=ppt/slides/slide33.xml><?xml version="1.0" encoding="utf-8"?>
+<file path=ppt/slides/slide32.xml><?xml version="1.0" encoding="utf-8"?>
 <p:sld xmlns:a="http://schemas.openxmlformats.org/drawingml/2006/main" xmlns:r="http://schemas.openxmlformats.org/officeDocument/2006/relationships" xmlns:p="http://schemas.openxmlformats.org/presentationml/2006/main">
   <p:cSld name="Slide 31">
     <p:bg>
@@ -9632,7 +9444,7 @@
 </p:sld>
 </file>
 
-<file path=ppt/slides/slide34.xml><?xml version="1.0" encoding="utf-8"?>
+<file path=ppt/slides/slide33.xml><?xml version="1.0" encoding="utf-8"?>
 <p:sld xmlns:a="http://schemas.openxmlformats.org/drawingml/2006/main" xmlns:r="http://schemas.openxmlformats.org/officeDocument/2006/relationships" xmlns:p="http://schemas.openxmlformats.org/presentationml/2006/main">
   <p:cSld name="Slide 32">
     <p:bg>
@@ -10000,7 +9812,7 @@
 </p:sld>
 </file>
 
-<file path=ppt/slides/slide35.xml><?xml version="1.0" encoding="utf-8"?>
+<file path=ppt/slides/slide34.xml><?xml version="1.0" encoding="utf-8"?>
 <p:sld xmlns:a="http://schemas.openxmlformats.org/drawingml/2006/main" xmlns:r="http://schemas.openxmlformats.org/officeDocument/2006/relationships" xmlns:p="http://schemas.openxmlformats.org/presentationml/2006/main">
   <p:cSld name="Slide 33">
     <p:bg>
@@ -10240,7 +10052,7 @@
 </p:sld>
 </file>
 
-<file path=ppt/slides/slide36.xml><?xml version="1.0" encoding="utf-8"?>
+<file path=ppt/slides/slide35.xml><?xml version="1.0" encoding="utf-8"?>
 <p:sld xmlns:a="http://schemas.openxmlformats.org/drawingml/2006/main" xmlns:r="http://schemas.openxmlformats.org/officeDocument/2006/relationships" xmlns:p="http://schemas.openxmlformats.org/presentationml/2006/main">
   <p:cSld name="Slide 34">
     <p:bg>
@@ -10361,7 +10173,7 @@
 </p:sld>
 </file>
 
-<file path=ppt/slides/slide37.xml><?xml version="1.0" encoding="utf-8"?>
+<file path=ppt/slides/slide36.xml><?xml version="1.0" encoding="utf-8"?>
 <p:sld xmlns:a="http://schemas.openxmlformats.org/drawingml/2006/main" xmlns:r="http://schemas.openxmlformats.org/officeDocument/2006/relationships" xmlns:p="http://schemas.openxmlformats.org/presentationml/2006/main">
   <p:cSld name="Slide 35">
     <p:bg>
@@ -10513,7 +10325,7 @@
 </p:sld>
 </file>
 
-<file path=ppt/slides/slide38.xml><?xml version="1.0" encoding="utf-8"?>
+<file path=ppt/slides/slide37.xml><?xml version="1.0" encoding="utf-8"?>
 <p:sld xmlns:a="http://schemas.openxmlformats.org/drawingml/2006/main" xmlns:r="http://schemas.openxmlformats.org/officeDocument/2006/relationships" xmlns:p="http://schemas.openxmlformats.org/presentationml/2006/main">
   <p:cSld name="Slide 36">
     <p:bg>
